--- a/docs/2026-2/cea055-estatistica-probabilidade/18-t-student-qui-quadrado/arquivos/Aula_18_T_Student_e_Qui_Quadrado.pptx
+++ b/docs/2026-2/cea055-estatistica-probabilidade/18-t-student-qui-quadrado/arquivos/Aula_18_T_Student_e_Qui_Quadrado.pptx
@@ -6435,7 +6435,7 @@
                 </a:r>
                 <a:r>
                   <a:rPr lang="pt-BR" sz="2800" dirty="0"/>
-                  <a:t xml:space="preserve">e o seu parâmetro n é chamado de </a:t>
+                  <a:t xml:space="preserve">e o seu parâmetro n − 1 é chamado de </a:t>
                 </a:r>
                 <a:r>
                   <a:rPr lang="pt-BR" sz="2800" i="1" dirty="0"/>

--- a/docs/2026-2/cea055-estatistica-probabilidade/18-t-student-qui-quadrado/arquivos/Aula_18_T_Student_e_Qui_Quadrado.pptx
+++ b/docs/2026-2/cea055-estatistica-probabilidade/18-t-student-qui-quadrado/arquivos/Aula_18_T_Student_e_Qui_Quadrado.pptx
@@ -3745,13 +3745,7 @@
       </p:grpSpPr>
       <p:sp>
         <p:nvSpPr>
-          <p:cNvPr id="2" name="Título 1">
-            <a:extLst>
-              <a:ext uri="{FF2B5EF4-FFF2-40B4-BE49-F238E27FC236}">
-                <a16:creationId xmlns:a16="http://schemas.microsoft.com/office/drawing/2014/main" id="{BC798918-7CB4-450A-A042-F0B538CA25DE}"/>
-              </a:ext>
-            </a:extLst>
-          </p:cNvPr>
+          <p:cNvPr id="2" name="Título 1"/>
           <p:cNvSpPr>
             <a:spLocks noGrp="1"/>
           </p:cNvSpPr>
@@ -3785,7 +3779,7 @@
             </a:br>
             <a:r>
               <a:rPr lang="pt-BR" sz="2200" b="1" dirty="0"/>
-              <a:t>T-Student e Qui-Quadrado</a:t>
+              <a:t>Distribuições t-Student e Qui-Quadrado</a:t>
             </a:r>
             <a:endParaRPr lang="pt-BR" dirty="0">
               <a:latin typeface="AlternateGothic2 BT" panose="020B0608020202050204" pitchFamily="34" charset="0"/>
@@ -3793,6 +3787,1171 @@
           </a:p>
         </p:txBody>
       </p:sp>
+      <p:sp>
+        <p:nvSpPr>
+          <p:cNvPr id="6" name="CaixaDeTexto 5"/>
+          <p:cNvSpPr txBox="1"/>
+          <p:nvPr/>
+        </p:nvSpPr>
+        <p:spPr>
+          <a:xfrm>
+            <a:off x="1032608" y="1750000"/>
+            <a:ext cx="10067277" cy="4200000"/>
+          </a:xfrm>
+          <a:prstGeom prst="rect">
+            <a:avLst/>
+          </a:prstGeom>
+          <a:noFill/>
+        </p:spPr>
+        <p:txBody>
+          <a:bodyPr wrap="square" rtlCol="0">
+            <a:spAutoFit/>
+          </a:bodyPr>
+          <a:lstStyle/>
+          <a:p>
+            <a:r>
+              <a:rPr lang="pt-BR" sz="2000" b="1" dirty="0"/>
+              <a:t>Objetivos da aula:</a:t>
+            </a:r>
+          </a:p>
+          <a:p>
+            <a:pPr marL="285737" indent="-285737">
+              <a:buFont typeface="Arial" panose="020B0604020202020204" pitchFamily="34" charset="0"/>
+              <a:buChar char="•"/>
+            </a:pPr>
+            <a:r>
+              <a:rPr lang="pt-BR" sz="2000" dirty="0"/>
+              <a:t>Reconhecer quando a distribuição t-Student substitui a normal padrão em problemas de inferência.</a:t>
+            </a:r>
+          </a:p>
+          <a:p>
+            <a:pPr marL="285737" indent="-285737">
+              <a:buFont typeface="Arial" panose="020B0604020202020204" pitchFamily="34" charset="0"/>
+              <a:buChar char="•"/>
+            </a:pPr>
+            <a:r>
+              <a:rPr lang="pt-BR" sz="2000" dirty="0"/>
+              <a:t>Utilizar a tabela t para obter valores críticos e probabilidades.</a:t>
+            </a:r>
+          </a:p>
+          <a:p>
+            <a:pPr marL="285737" indent="-285737">
+              <a:buFont typeface="Arial" panose="020B0604020202020204" pitchFamily="34" charset="0"/>
+              <a:buChar char="•"/>
+            </a:pPr>
+            <a:r>
+              <a:rPr lang="pt-BR" sz="2000" dirty="0"/>
+              <a:t>Conhecer a distribuição qui-quadrado, suas propriedades e sua tabela de valores críticos.</a:t>
+            </a:r>
+          </a:p>
+          <a:p>
+            <a:pPr marL="285737" indent="-285737">
+              <a:buFont typeface="Arial" panose="020B0604020202020204" pitchFamily="34" charset="0"/>
+              <a:buChar char="•"/>
+            </a:pPr>
+            <a:r>
+              <a:rPr lang="pt-BR" sz="2000" dirty="0"/>
+              <a:t>Relacionar as distribuições t, qui-quadrado e normal como base para os próximos testes de inferência.</a:t>
+            </a:r>
+          </a:p>
+          <a:p>
+            <a:r>
+              <a:rPr lang="pt-BR" sz="2000" b="1" dirty="0"/>
+              <a:t xml:space="preserve">Referências: </a:t>
+            </a:r>
+          </a:p>
+          <a:p>
+            <a:pPr marL="457178" indent="-457178">
+              <a:buFont typeface="Arial" panose="020B0604020202020204" pitchFamily="34" charset="0"/>
+              <a:buChar char="•"/>
+            </a:pPr>
+            <a:r>
+              <a:rPr lang="pt-BR" sz="1800" dirty="0"/>
+              <a:t xml:space="preserve">Bussab, Morettin. </a:t>
+            </a:r>
+            <a:r>
+              <a:rPr lang="pt-BR" sz="1800" b="1" dirty="0"/>
+              <a:t>Estatística Básica</a:t>
+            </a:r>
+            <a:r>
+              <a:rPr lang="pt-BR" sz="1800" dirty="0"/>
+              <a:t>, 9ed — Cap. 7 (7.7.2, 7.7.3)</a:t>
+            </a:r>
+          </a:p>
+          <a:p>
+            <a:pPr marL="457178" indent="-457178">
+              <a:buFont typeface="Arial" panose="020B0604020202020204" pitchFamily="34" charset="0"/>
+              <a:buChar char="•"/>
+            </a:pPr>
+            <a:r>
+              <a:rPr lang="pt-BR" sz="1800" dirty="0"/>
+              <a:t xml:space="preserve">Montgomery, Runger. </a:t>
+            </a:r>
+            <a:r>
+              <a:rPr lang="pt-BR" sz="1800" b="1" dirty="0"/>
+              <a:t>Applied Statistics and Probability for Engineers</a:t>
+            </a:r>
+            <a:r>
+              <a:rPr lang="pt-BR" sz="1800" dirty="0"/>
+              <a:t>, 7th ed — Cap. 8 (8.2.1)</a:t>
+            </a:r>
+          </a:p>
+          <a:p>
+            <a:pPr marL="457178" indent="-457178">
+              <a:buFont typeface="Arial" panose="020B0604020202020204" pitchFamily="34" charset="0"/>
+              <a:buChar char="•"/>
+            </a:pPr>
+            <a:r>
+              <a:rPr lang="pt-BR" sz="1800" dirty="0"/>
+              <a:t xml:space="preserve">Magalhães, Lima. </a:t>
+            </a:r>
+            <a:r>
+              <a:rPr lang="pt-BR" sz="1800" b="1" dirty="0"/>
+              <a:t>Noções de Probabilidade e Estatística</a:t>
+            </a:r>
+            <a:r>
+              <a:rPr lang="pt-BR" sz="1800" dirty="0"/>
+              <a:t>, 5ed — Cap. 7 (7.4); Cap. 8 (8.5)</a:t>
+            </a:r>
+          </a:p>
+          <a:p>
+            <a:pPr marL="457178" indent="-457178">
+              <a:buFont typeface="Arial" panose="020B0604020202020204" pitchFamily="34" charset="0"/>
+              <a:buChar char="•"/>
+            </a:pPr>
+            <a:r>
+              <a:rPr lang="pt-BR" sz="1800" dirty="0"/>
+              <a:t xml:space="preserve">Morettin. </a:t>
+            </a:r>
+            <a:r>
+              <a:rPr lang="pt-BR" sz="1800" b="1" dirty="0"/>
+              <a:t>Estatística Básica: Probabilidade e Inferência</a:t>
+            </a:r>
+            <a:r>
+              <a:rPr lang="pt-BR" sz="1800" dirty="0"/>
+              <a:t>, — Cap. 14 (14.1); Cap. 16 (16.1)</a:t>
+            </a:r>
+          </a:p>
+        </p:txBody>
+      </p:sp>
+      <p:sp>
+        <p:nvSpPr>
+          <p:cNvPr id="3" name="CaixaDeTexto 2"/>
+          <p:cNvSpPr txBox="1"/>
+          <p:nvPr/>
+        </p:nvSpPr>
+        <p:spPr>
+          <a:xfrm>
+            <a:off x="361395" y="6488668"/>
+            <a:ext cx="2395336" cy="300210"/>
+          </a:xfrm>
+          <a:prstGeom prst="rect">
+            <a:avLst/>
+          </a:prstGeom>
+          <a:noFill/>
+        </p:spPr>
+        <p:txBody>
+          <a:bodyPr wrap="none" rtlCol="0">
+            <a:spAutoFit/>
+          </a:bodyPr>
+          <a:lstStyle/>
+          <a:p>
+            <a:r>
+              <a:rPr lang="pt-BR" sz="1351" dirty="0"/>
+              <a:t>Professor: Marcos Goulart Lima</a:t>
+            </a:r>
+          </a:p>
+        </p:txBody>
+      </p:sp>
+      <p:pic>
+        <p:nvPicPr>
+          <p:cNvPr id="8" name="Logo UFOP"/>
+          <p:cNvPicPr>
+            <a:picLocks noChangeAspect="1"/>
+          </p:cNvPicPr>
+          <p:nvPr/>
+        </p:nvPicPr>
+        <p:blipFill>
+          <a:blip r:embed="rId3"/>
+          <a:stretch>
+            <a:fillRect/>
+          </a:stretch>
+        </p:blipFill>
+        <p:spPr>
+          <a:xfrm>
+            <a:off x="62144" y="112237"/>
+            <a:ext cx="588096" cy="1228523"/>
+          </a:xfrm>
+          <a:prstGeom prst="rect">
+            <a:avLst/>
+          </a:prstGeom>
+        </p:spPr>
+      </p:pic>
+    </p:spTree>
+  </p:cSld>
+  <p:clrMapOvr>
+    <a:masterClrMapping/>
+  </p:clrMapOvr>
+</p:sld>
+</file>
+
+<file path=ppt/slides/slide10.xml><?xml version="1.0" encoding="utf-8"?>
+<p:sld xmlns:a="http://schemas.openxmlformats.org/drawingml/2006/main" xmlns:r="http://schemas.openxmlformats.org/officeDocument/2006/relationships" xmlns:p="http://schemas.openxmlformats.org/presentationml/2006/main">
+  <p:cSld>
+    <p:spTree>
+      <p:nvGrpSpPr>
+        <p:cNvPr id="1" name=""/>
+        <p:cNvGrpSpPr/>
+        <p:nvPr/>
+      </p:nvGrpSpPr>
+      <p:grpSpPr>
+        <a:xfrm>
+          <a:off x="0" y="0"/>
+          <a:ext cx="0" cy="0"/>
+          <a:chOff x="0" y="0"/>
+          <a:chExt cx="0" cy="0"/>
+        </a:xfrm>
+      </p:grpSpPr>
+      <p:sp>
+        <p:nvSpPr>
+          <p:cNvPr id="6" name="Caixa"/>
+          <p:cNvSpPr txBox="1"/>
+          <p:nvPr/>
+        </p:nvSpPr>
+        <p:spPr>
+          <a:xfrm>
+            <a:off x="685800" y="1150000"/>
+            <a:ext cx="5400000" cy="4900000"/>
+          </a:xfrm>
+          <a:prstGeom prst="rect">
+            <a:avLst/>
+          </a:prstGeom>
+          <a:noFill/>
+        </p:spPr>
+        <p:txBody>
+          <a:bodyPr wrap="square" rtlCol="0">
+            <a:normAutofit/>
+          </a:bodyPr>
+          <a:lstStyle/>
+          <a:p>
+            <a:pPr/>
+            <a:r>
+              <a:rPr lang="pt-BR" sz="2000" b="1" dirty="0"/>
+              <a:t>O formato da curva χ²</a:t>
+            </a:r>
+          </a:p>
+          <a:p>
+            <a:pPr marL="342900" indent="-342900">
+              <a:buFont typeface="Arial" panose="020B0604020202020204" pitchFamily="34" charset="0"/>
+              <a:buChar char="•"/>
+            </a:pPr>
+            <a:r>
+              <a:rPr lang="pt-BR" sz="1600" dirty="0"/>
+              <a:t>Ao contrário da t, a distribuição qui-quadrado não é simétrica — só assume valores positivos (é soma de quadrados).</a:t>
+            </a:r>
+          </a:p>
+          <a:p>
+            <a:pPr marL="342900" indent="-342900">
+              <a:buFont typeface="Arial" panose="020B0604020202020204" pitchFamily="34" charset="0"/>
+              <a:buChar char="•"/>
+            </a:pPr>
+            <a:r>
+              <a:rPr lang="pt-BR" sz="1600" dirty="0"/>
+              <a:t>Para poucos graus de liberdade, a curva é bastante assimétrica à direita.</a:t>
+            </a:r>
+          </a:p>
+          <a:p>
+            <a:pPr marL="342900" indent="-342900">
+              <a:buFont typeface="Arial" panose="020B0604020202020204" pitchFamily="34" charset="0"/>
+              <a:buChar char="•"/>
+            </a:pPr>
+            <a:r>
+              <a:rPr lang="pt-BR" sz="1600" dirty="0"/>
+              <a:t>À medida que ν cresce, a curva fica mais simétrica e se aproxima do formato de uma Normal.</a:t>
+            </a:r>
+          </a:p>
+        </p:txBody>
+      </p:sp>
+      <p:pic>
+        <p:nvPicPr>
+          <p:cNvPr id="9" name="Curvas qui-quadrado"/>
+          <p:cNvPicPr>
+            <a:picLocks noChangeAspect="1"/>
+          </p:cNvPicPr>
+          <p:nvPr/>
+        </p:nvPicPr>
+        <p:blipFill>
+          <a:blip r:embed="rId4"/>
+          <a:stretch>
+            <a:fillRect/>
+          </a:stretch>
+        </p:blipFill>
+        <p:spPr>
+          <a:xfrm>
+            <a:off x="6300000" y="1500000"/>
+            <a:ext cx="4900000" cy="3050000"/>
+          </a:xfrm>
+          <a:prstGeom prst="rect">
+            <a:avLst/>
+          </a:prstGeom>
+        </p:spPr>
+      </p:pic>
+      <p:sp>
+        <p:nvSpPr>
+          <p:cNvPr id="3" name="CaixaDeTexto 2"/>
+          <p:cNvSpPr txBox="1"/>
+          <p:nvPr/>
+        </p:nvSpPr>
+        <p:spPr>
+          <a:xfrm>
+            <a:off x="361395" y="6488668"/>
+            <a:ext cx="7620000" cy="300210"/>
+          </a:xfrm>
+          <a:prstGeom prst="rect">
+            <a:avLst/>
+          </a:prstGeom>
+          <a:noFill/>
+        </p:spPr>
+        <p:txBody>
+          <a:bodyPr wrap="none" rtlCol="0">
+            <a:spAutoFit/>
+          </a:bodyPr>
+          <a:lstStyle/>
+          <a:p>
+            <a:r>
+              <a:rPr lang="pt-BR" sz="1351" dirty="0"/>
+              <a:t>CEA055 - Estatística e Probabilidade - Professor: Marcos Goulart Lima</a:t>
+            </a:r>
+          </a:p>
+        </p:txBody>
+      </p:sp>
+    </p:spTree>
+  </p:cSld>
+  <p:clrMapOvr>
+    <a:masterClrMapping/>
+  </p:clrMapOvr>
+</p:sld>
+</file>
+
+<file path=ppt/slides/slide11.xml><?xml version="1.0" encoding="utf-8"?>
+<p:sld xmlns:a="http://schemas.openxmlformats.org/drawingml/2006/main" xmlns:r="http://schemas.openxmlformats.org/officeDocument/2006/relationships" xmlns:p="http://schemas.openxmlformats.org/presentationml/2006/main">
+  <p:cSld>
+    <p:spTree>
+      <p:nvGrpSpPr>
+        <p:cNvPr id="1" name=""/>
+        <p:cNvGrpSpPr/>
+        <p:nvPr/>
+      </p:nvGrpSpPr>
+      <p:grpSpPr>
+        <a:xfrm>
+          <a:off x="0" y="0"/>
+          <a:ext cx="0" cy="0"/>
+          <a:chOff x="0" y="0"/>
+          <a:chExt cx="0" cy="0"/>
+        </a:xfrm>
+      </p:grpSpPr>
+      <p:pic>
+        <p:nvPicPr>
+          <p:cNvPr id="9" name="Tabela qui-quadrado"/>
+          <p:cNvPicPr>
+            <a:picLocks noChangeAspect="1"/>
+          </p:cNvPicPr>
+          <p:nvPr/>
+        </p:nvPicPr>
+        <p:blipFill>
+          <a:blip r:embed="rId4"/>
+          <a:stretch>
+            <a:fillRect/>
+          </a:stretch>
+        </p:blipFill>
+        <p:spPr>
+          <a:xfrm>
+            <a:off x="1596000" y="1200000"/>
+            <a:ext cx="9000000" cy="5477000"/>
+          </a:xfrm>
+          <a:prstGeom prst="rect">
+            <a:avLst/>
+          </a:prstGeom>
+        </p:spPr>
+      </p:pic>
+      <p:sp>
+        <p:nvSpPr>
+          <p:cNvPr id="3" name="CaixaDeTexto 2"/>
+          <p:cNvSpPr txBox="1"/>
+          <p:nvPr/>
+        </p:nvSpPr>
+        <p:spPr>
+          <a:xfrm>
+            <a:off x="361395" y="6488668"/>
+            <a:ext cx="7620000" cy="300210"/>
+          </a:xfrm>
+          <a:prstGeom prst="rect">
+            <a:avLst/>
+          </a:prstGeom>
+          <a:noFill/>
+        </p:spPr>
+        <p:txBody>
+          <a:bodyPr wrap="none" rtlCol="0">
+            <a:spAutoFit/>
+          </a:bodyPr>
+          <a:lstStyle/>
+          <a:p>
+            <a:r>
+              <a:rPr lang="pt-BR" sz="1351" dirty="0"/>
+              <a:t>CEA055 - Estatística e Probabilidade - Professor: Marcos Goulart Lima</a:t>
+            </a:r>
+          </a:p>
+        </p:txBody>
+      </p:sp>
+    </p:spTree>
+  </p:cSld>
+  <p:clrMapOvr>
+    <a:masterClrMapping/>
+  </p:clrMapOvr>
+</p:sld>
+</file>
+
+<file path=ppt/slides/slide12.xml><?xml version="1.0" encoding="utf-8"?>
+<p:sld xmlns:a="http://schemas.openxmlformats.org/drawingml/2006/main" xmlns:r="http://schemas.openxmlformats.org/officeDocument/2006/relationships" xmlns:p="http://schemas.openxmlformats.org/presentationml/2006/main">
+  <p:cSld>
+    <p:spTree>
+      <p:nvGrpSpPr>
+        <p:cNvPr id="1" name=""/>
+        <p:cNvGrpSpPr/>
+        <p:nvPr/>
+      </p:nvGrpSpPr>
+      <p:grpSpPr>
+        <a:xfrm>
+          <a:off x="0" y="0"/>
+          <a:ext cx="0" cy="0"/>
+          <a:chOff x="0" y="0"/>
+          <a:chExt cx="0" cy="0"/>
+        </a:xfrm>
+      </p:grpSpPr>
+      <p:sp>
+        <p:nvSpPr>
+          <p:cNvPr id="6" name="Caixa"/>
+          <p:cNvSpPr txBox="1"/>
+          <p:nvPr/>
+        </p:nvSpPr>
+        <p:spPr>
+          <a:xfrm>
+            <a:off x="685800" y="1150000"/>
+            <a:ext cx="10800000" cy="3900000"/>
+          </a:xfrm>
+          <a:prstGeom prst="rect">
+            <a:avLst/>
+          </a:prstGeom>
+          <a:noFill/>
+        </p:spPr>
+        <p:txBody>
+          <a:bodyPr wrap="square" rtlCol="0">
+            <a:normAutofit/>
+          </a:bodyPr>
+          <a:lstStyle/>
+          <a:p>
+            <a:pPr/>
+            <a:r>
+              <a:rPr lang="pt-BR" sz="2000" b="1" dirty="0"/>
+              <a:t>Como usar a tabela qui-quadrado</a:t>
+            </a:r>
+          </a:p>
+          <a:p>
+            <a:endParaRPr lang="pt-BR" sz="1800" dirty="0"/>
+          </a:p>
+          <a:p>
+            <a:pPr marL="342900" indent="-342900">
+              <a:buFont typeface="Arial" panose="020B0604020202020204" pitchFamily="34" charset="0"/>
+              <a:buChar char="•"/>
+            </a:pPr>
+            <a:r>
+              <a:rPr lang="pt-BR" sz="1700" dirty="0"/>
+              <a:t>Passo 1. Determine os graus de liberdade ν = n − 1.</a:t>
+            </a:r>
+          </a:p>
+          <a:p>
+            <a:pPr marL="342900" indent="-342900">
+              <a:buFont typeface="Arial" panose="020B0604020202020204" pitchFamily="34" charset="0"/>
+              <a:buChar char="•"/>
+            </a:pPr>
+            <a:r>
+              <a:rPr lang="pt-BR" sz="1700" dirty="0"/>
+              <a:t>Passo 2. Fixe a probabilidade de interesse p (ou α).</a:t>
+            </a:r>
+          </a:p>
+          <a:p>
+            <a:pPr marL="342900" indent="-342900">
+              <a:buFont typeface="Arial" panose="020B0604020202020204" pitchFamily="34" charset="0"/>
+              <a:buChar char="•"/>
+            </a:pPr>
+            <a:r>
+              <a:rPr lang="pt-BR" sz="1700" dirty="0"/>
+              <a:t>Passo 3. Localize a linha ν e a coluna p na tabela; o valor encontrado é χ²_c, tal que:</a:t>
+            </a:r>
+          </a:p>
+        </p:txBody>
+      </p:sp>
+      <p:pic>
+        <p:nvPicPr>
+          <p:cNvPr id="9" name="P(chi2 &gt; chi2c) = alfa"/>
+          <p:cNvPicPr>
+            <a:picLocks noChangeAspect="1"/>
+          </p:cNvPicPr>
+          <p:nvPr/>
+        </p:nvPicPr>
+        <p:blipFill>
+          <a:blip r:embed="rId4"/>
+          <a:stretch>
+            <a:fillRect/>
+          </a:stretch>
+        </p:blipFill>
+        <p:spPr>
+          <a:xfrm>
+            <a:off x="3400000" y="4700000"/>
+            <a:ext cx="5400000" cy="1150000"/>
+          </a:xfrm>
+          <a:prstGeom prst="rect">
+            <a:avLst/>
+          </a:prstGeom>
+        </p:spPr>
+      </p:pic>
+      <p:sp>
+        <p:nvSpPr>
+          <p:cNvPr id="3" name="CaixaDeTexto 2"/>
+          <p:cNvSpPr txBox="1"/>
+          <p:nvPr/>
+        </p:nvSpPr>
+        <p:spPr>
+          <a:xfrm>
+            <a:off x="361395" y="6488668"/>
+            <a:ext cx="7620000" cy="300210"/>
+          </a:xfrm>
+          <a:prstGeom prst="rect">
+            <a:avLst/>
+          </a:prstGeom>
+          <a:noFill/>
+        </p:spPr>
+        <p:txBody>
+          <a:bodyPr wrap="none" rtlCol="0">
+            <a:spAutoFit/>
+          </a:bodyPr>
+          <a:lstStyle/>
+          <a:p>
+            <a:r>
+              <a:rPr lang="pt-BR" sz="1351" dirty="0"/>
+              <a:t>CEA055 - Estatística e Probabilidade - Professor: Marcos Goulart Lima</a:t>
+            </a:r>
+          </a:p>
+        </p:txBody>
+      </p:sp>
+    </p:spTree>
+  </p:cSld>
+  <p:clrMapOvr>
+    <a:masterClrMapping/>
+  </p:clrMapOvr>
+</p:sld>
+</file>
+
+<file path=ppt/slides/slide13.xml><?xml version="1.0" encoding="utf-8"?>
+<p:sld xmlns:a="http://schemas.openxmlformats.org/drawingml/2006/main" xmlns:r="http://schemas.openxmlformats.org/officeDocument/2006/relationships" xmlns:p="http://schemas.openxmlformats.org/presentationml/2006/main">
+  <p:cSld>
+    <p:spTree>
+      <p:nvGrpSpPr>
+        <p:cNvPr id="1" name=""/>
+        <p:cNvGrpSpPr/>
+        <p:nvPr/>
+      </p:nvGrpSpPr>
+      <p:grpSpPr>
+        <a:xfrm>
+          <a:off x="0" y="0"/>
+          <a:ext cx="0" cy="0"/>
+          <a:chOff x="0" y="0"/>
+          <a:chExt cx="0" cy="0"/>
+        </a:xfrm>
+      </p:grpSpPr>
+      <p:sp>
+        <p:nvSpPr>
+          <p:cNvPr id="6" name="Caixa"/>
+          <p:cNvSpPr txBox="1"/>
+          <p:nvPr/>
+        </p:nvSpPr>
+        <p:spPr>
+          <a:xfrm>
+            <a:off x="685800" y="1150000"/>
+            <a:ext cx="10800000" cy="5100000"/>
+          </a:xfrm>
+          <a:prstGeom prst="rect">
+            <a:avLst/>
+          </a:prstGeom>
+          <a:noFill/>
+        </p:spPr>
+        <p:txBody>
+          <a:bodyPr wrap="square" rtlCol="0">
+            <a:normAutofit/>
+          </a:bodyPr>
+          <a:lstStyle/>
+          <a:p>
+            <a:pPr/>
+            <a:r>
+              <a:rPr lang="pt-BR" sz="2000" b="1" dirty="0"/>
+              <a:t>Exemplo: variância de um processo de fabricação</a:t>
+            </a:r>
+          </a:p>
+          <a:p>
+            <a:endParaRPr lang="pt-BR" sz="1800" dirty="0"/>
+          </a:p>
+          <a:p>
+            <a:pPr/>
+            <a:r>
+              <a:rPr lang="pt-BR" sz="1700" dirty="0"/>
+              <a:t>Uma fábrica de parafusos afirma que o diâmetro de suas peças tem desvio padrão de no máximo 0,04 mm. Uma amostra de n = 20 parafusos apresentou variância amostral S² = 0,0021 mm².</a:t>
+            </a:r>
+          </a:p>
+          <a:p>
+            <a:endParaRPr lang="pt-BR" sz="1800" dirty="0"/>
+          </a:p>
+          <a:p>
+            <a:pPr marL="342900" indent="-342900">
+              <a:buFont typeface="Arial" panose="020B0604020202020204" pitchFamily="34" charset="0"/>
+              <a:buChar char="•"/>
+            </a:pPr>
+            <a:r>
+              <a:rPr lang="pt-BR" sz="1700" dirty="0"/>
+              <a:t>A estatística do teste é χ² = (n − 1)S² / σ²₀, com σ²₀ = 0,04² = 0,0016 e ν = 19 graus de liberdade.</a:t>
+            </a:r>
+          </a:p>
+          <a:p>
+            <a:pPr marL="342900" indent="-342900">
+              <a:buFont typeface="Arial" panose="020B0604020202020204" pitchFamily="34" charset="0"/>
+              <a:buChar char="•"/>
+            </a:pPr>
+            <a:r>
+              <a:rPr lang="pt-BR" sz="1700" dirty="0"/>
+              <a:t>Substituindo: χ² = 19 × 0,0021 / 0,0016 = 24,94.</a:t>
+            </a:r>
+          </a:p>
+          <a:p>
+            <a:pPr marL="342900" indent="-342900">
+              <a:buFont typeface="Arial" panose="020B0604020202020204" pitchFamily="34" charset="0"/>
+              <a:buChar char="•"/>
+            </a:pPr>
+            <a:r>
+              <a:rPr lang="pt-BR" sz="1700" dirty="0"/>
+              <a:t>Consultando a tabela com ν = 19 e p = 0,05, obtemos χ²_c = 30,144.</a:t>
+            </a:r>
+          </a:p>
+          <a:p>
+            <a:pPr marL="342900" indent="-342900">
+              <a:buFont typeface="Arial" panose="020B0604020202020204" pitchFamily="34" charset="0"/>
+              <a:buChar char="•"/>
+            </a:pPr>
+            <a:r>
+              <a:rPr lang="pt-BR" sz="1700" dirty="0"/>
+              <a:t>Como χ² = 24,94 &lt; 30,144, o valor observado é compatível com a afirmação do fabricante — não há evidência de que a variabilidade seja maior que a declarada.</a:t>
+            </a:r>
+          </a:p>
+        </p:txBody>
+      </p:sp>
+      <p:sp>
+        <p:nvSpPr>
+          <p:cNvPr id="3" name="CaixaDeTexto 2"/>
+          <p:cNvSpPr txBox="1"/>
+          <p:nvPr/>
+        </p:nvSpPr>
+        <p:spPr>
+          <a:xfrm>
+            <a:off x="361395" y="6488668"/>
+            <a:ext cx="7620000" cy="300210"/>
+          </a:xfrm>
+          <a:prstGeom prst="rect">
+            <a:avLst/>
+          </a:prstGeom>
+          <a:noFill/>
+        </p:spPr>
+        <p:txBody>
+          <a:bodyPr wrap="none" rtlCol="0">
+            <a:spAutoFit/>
+          </a:bodyPr>
+          <a:lstStyle/>
+          <a:p>
+            <a:r>
+              <a:rPr lang="pt-BR" sz="1351" dirty="0"/>
+              <a:t>CEA055 - Estatística e Probabilidade - Professor: Marcos Goulart Lima</a:t>
+            </a:r>
+          </a:p>
+        </p:txBody>
+      </p:sp>
+    </p:spTree>
+  </p:cSld>
+  <p:clrMapOvr>
+    <a:masterClrMapping/>
+  </p:clrMapOvr>
+</p:sld>
+</file>
+
+<file path=ppt/slides/slide14.xml><?xml version="1.0" encoding="utf-8"?>
+<p:sld xmlns:a="http://schemas.openxmlformats.org/drawingml/2006/main" xmlns:r="http://schemas.openxmlformats.org/officeDocument/2006/relationships" xmlns:p="http://schemas.openxmlformats.org/presentationml/2006/main">
+  <p:cSld>
+    <p:spTree>
+      <p:nvGrpSpPr>
+        <p:cNvPr id="1" name=""/>
+        <p:cNvGrpSpPr/>
+        <p:nvPr/>
+      </p:nvGrpSpPr>
+      <p:grpSpPr>
+        <a:xfrm>
+          <a:off x="0" y="0"/>
+          <a:ext cx="0" cy="0"/>
+          <a:chOff x="0" y="0"/>
+          <a:chExt cx="0" cy="0"/>
+        </a:xfrm>
+      </p:grpSpPr>
+      <p:sp>
+        <p:nvSpPr>
+          <p:cNvPr id="6" name="Caixa"/>
+          <p:cNvSpPr txBox="1"/>
+          <p:nvPr/>
+        </p:nvSpPr>
+        <p:spPr>
+          <a:xfrm>
+            <a:off x="685800" y="1150000"/>
+            <a:ext cx="10800000" cy="2100000"/>
+          </a:xfrm>
+          <a:prstGeom prst="rect">
+            <a:avLst/>
+          </a:prstGeom>
+          <a:noFill/>
+        </p:spPr>
+        <p:txBody>
+          <a:bodyPr wrap="square" rtlCol="0">
+            <a:normAutofit/>
+          </a:bodyPr>
+          <a:lstStyle/>
+          <a:p>
+            <a:pPr/>
+            <a:r>
+              <a:rPr lang="pt-BR" sz="2000" b="1" dirty="0"/>
+              <a:t>Como as três distribuições se conectam</a:t>
+            </a:r>
+          </a:p>
+          <a:p>
+            <a:pPr/>
+            <a:r>
+              <a:rPr lang="pt-BR" sz="1700" dirty="0"/>
+              <a:t>A distribuição t-Student pode ser construída a partir de uma Normal padrão Z e de uma qui-quadrado independente:</a:t>
+            </a:r>
+          </a:p>
+        </p:txBody>
+      </p:sp>
+      <p:pic>
+        <p:nvPicPr>
+          <p:cNvPr id="9" name="T = Z / raiz(chi2/(n-1))"/>
+          <p:cNvPicPr>
+            <a:picLocks noChangeAspect="1"/>
+          </p:cNvPicPr>
+          <p:nvPr/>
+        </p:nvPicPr>
+        <p:blipFill>
+          <a:blip r:embed="rId4"/>
+          <a:stretch>
+            <a:fillRect/>
+          </a:stretch>
+        </p:blipFill>
+        <p:spPr>
+          <a:xfrm>
+            <a:off x="3000000" y="3150000"/>
+            <a:ext cx="6200000" cy="1300000"/>
+          </a:xfrm>
+          <a:prstGeom prst="rect">
+            <a:avLst/>
+          </a:prstGeom>
+        </p:spPr>
+      </p:pic>
+      <p:sp>
+        <p:nvSpPr>
+          <p:cNvPr id="11" name="Caixa"/>
+          <p:cNvSpPr txBox="1"/>
+          <p:nvPr/>
+        </p:nvSpPr>
+        <p:spPr>
+          <a:xfrm>
+            <a:off x="685800" y="4750000"/>
+            <a:ext cx="10800000" cy="1700000"/>
+          </a:xfrm>
+          <a:prstGeom prst="rect">
+            <a:avLst/>
+          </a:prstGeom>
+          <a:noFill/>
+        </p:spPr>
+        <p:txBody>
+          <a:bodyPr wrap="square" rtlCol="0">
+            <a:normAutofit/>
+          </a:bodyPr>
+          <a:lstStyle/>
+          <a:p>
+            <a:pPr/>
+            <a:r>
+              <a:rPr lang="pt-BR" sz="1600" i="1" dirty="0"/>
+              <a:t>Isso mostra por que a t tem caudas mais pesadas: ela “herda” a variabilidade extra de estimar σ² pela χ² amostral, além da própria variabilidade de Z.</a:t>
+            </a:r>
+          </a:p>
+        </p:txBody>
+      </p:sp>
+      <p:sp>
+        <p:nvSpPr>
+          <p:cNvPr id="3" name="CaixaDeTexto 2"/>
+          <p:cNvSpPr txBox="1"/>
+          <p:nvPr/>
+        </p:nvSpPr>
+        <p:spPr>
+          <a:xfrm>
+            <a:off x="361395" y="6488668"/>
+            <a:ext cx="7620000" cy="300210"/>
+          </a:xfrm>
+          <a:prstGeom prst="rect">
+            <a:avLst/>
+          </a:prstGeom>
+          <a:noFill/>
+        </p:spPr>
+        <p:txBody>
+          <a:bodyPr wrap="none" rtlCol="0">
+            <a:spAutoFit/>
+          </a:bodyPr>
+          <a:lstStyle/>
+          <a:p>
+            <a:r>
+              <a:rPr lang="pt-BR" sz="1351" dirty="0"/>
+              <a:t>CEA055 - Estatística e Probabilidade - Professor: Marcos Goulart Lima</a:t>
+            </a:r>
+          </a:p>
+        </p:txBody>
+      </p:sp>
+    </p:spTree>
+  </p:cSld>
+  <p:clrMapOvr>
+    <a:masterClrMapping/>
+  </p:clrMapOvr>
+</p:sld>
+</file>
+
+<file path=ppt/slides/slide15.xml><?xml version="1.0" encoding="utf-8"?>
+<p:sld xmlns:a="http://schemas.openxmlformats.org/drawingml/2006/main" xmlns:r="http://schemas.openxmlformats.org/officeDocument/2006/relationships" xmlns:p="http://schemas.openxmlformats.org/presentationml/2006/main">
+  <p:cSld>
+    <p:spTree>
+      <p:nvGrpSpPr>
+        <p:cNvPr id="1" name=""/>
+        <p:cNvGrpSpPr/>
+        <p:nvPr/>
+      </p:nvGrpSpPr>
+      <p:grpSpPr>
+        <a:xfrm>
+          <a:off x="0" y="0"/>
+          <a:ext cx="0" cy="0"/>
+          <a:chOff x="0" y="0"/>
+          <a:chExt cx="0" cy="0"/>
+        </a:xfrm>
+      </p:grpSpPr>
+      <p:sp>
+        <p:nvSpPr>
+          <p:cNvPr id="6" name="Caixa"/>
+          <p:cNvSpPr txBox="1"/>
+          <p:nvPr/>
+        </p:nvSpPr>
+        <p:spPr>
+          <a:xfrm>
+            <a:off x="685800" y="1150000"/>
+            <a:ext cx="10800000" cy="5100000"/>
+          </a:xfrm>
+          <a:prstGeom prst="rect">
+            <a:avLst/>
+          </a:prstGeom>
+          <a:noFill/>
+        </p:spPr>
+        <p:txBody>
+          <a:bodyPr wrap="square" rtlCol="0">
+            <a:normAutofit/>
+          </a:bodyPr>
+          <a:lstStyle/>
+          <a:p>
+            <a:pPr/>
+            <a:r>
+              <a:rPr lang="pt-BR" sz="2000" b="1" dirty="0"/>
+              <a:t>Resumo da aula</a:t>
+            </a:r>
+          </a:p>
+          <a:p>
+            <a:endParaRPr lang="pt-BR" sz="1800" dirty="0"/>
+          </a:p>
+          <a:p>
+            <a:pPr marL="342900" indent="-342900">
+              <a:buFont typeface="Arial" panose="020B0604020202020204" pitchFamily="34" charset="0"/>
+              <a:buChar char="•"/>
+            </a:pPr>
+            <a:r>
+              <a:rPr lang="pt-BR" sz="1800" dirty="0"/>
+              <a:t>Use a distribuição t-Student quando: a população é (aproximadamente) Normal, σ² é desconhecida, e o interesse é a média μ.</a:t>
+            </a:r>
+          </a:p>
+          <a:p>
+            <a:pPr marL="342900" indent="-342900">
+              <a:buFont typeface="Arial" panose="020B0604020202020204" pitchFamily="34" charset="0"/>
+              <a:buChar char="•"/>
+            </a:pPr>
+            <a:r>
+              <a:rPr lang="pt-BR" sz="1800" dirty="0"/>
+              <a:t>Use a distribuição qui-quadrado quando: a população é (aproximadamente) Normal e o interesse é a variância σ².</a:t>
+            </a:r>
+          </a:p>
+          <a:p>
+            <a:pPr marL="342900" indent="-342900">
+              <a:buFont typeface="Arial" panose="020B0604020202020204" pitchFamily="34" charset="0"/>
+              <a:buChar char="•"/>
+            </a:pPr>
+            <a:r>
+              <a:rPr lang="pt-BR" sz="1800" dirty="0"/>
+              <a:t>Ambas dependem apenas dos graus de liberdade ν = n − 1 e são consultadas por tabela, nunca calculadas diretamente em sala.</a:t>
+            </a:r>
+          </a:p>
+          <a:p>
+            <a:pPr marL="342900" indent="-342900">
+              <a:buFont typeface="Arial" panose="020B0604020202020204" pitchFamily="34" charset="0"/>
+              <a:buChar char="•"/>
+            </a:pPr>
+            <a:r>
+              <a:rPr lang="pt-BR" sz="1800" dirty="0"/>
+              <a:t>Quando ν é grande, a t se aproxima da Normal e a χ² fica mais simétrica.</a:t>
+            </a:r>
+          </a:p>
+          <a:p>
+            <a:endParaRPr lang="pt-BR" sz="1800" dirty="0"/>
+          </a:p>
+          <a:p>
+            <a:pPr/>
+            <a:r>
+              <a:rPr lang="pt-BR" sz="1700" i="1" dirty="0"/>
+              <a:t>Próximas aulas: vamos usar a t e a χ² para construir intervalos de confiança e testes de hipótese completos.</a:t>
+            </a:r>
+          </a:p>
+        </p:txBody>
+      </p:sp>
+      <p:sp>
+        <p:nvSpPr>
+          <p:cNvPr id="3" name="CaixaDeTexto 2"/>
+          <p:cNvSpPr txBox="1"/>
+          <p:nvPr/>
+        </p:nvSpPr>
+        <p:spPr>
+          <a:xfrm>
+            <a:off x="361395" y="6488668"/>
+            <a:ext cx="7620000" cy="300210"/>
+          </a:xfrm>
+          <a:prstGeom prst="rect">
+            <a:avLst/>
+          </a:prstGeom>
+          <a:noFill/>
+        </p:spPr>
+        <p:txBody>
+          <a:bodyPr wrap="none" rtlCol="0">
+            <a:spAutoFit/>
+          </a:bodyPr>
+          <a:lstStyle/>
+          <a:p>
+            <a:r>
+              <a:rPr lang="pt-BR" sz="1351" dirty="0"/>
+              <a:t>CEA055 - Estatística e Probabilidade - Professor: Marcos Goulart Lima</a:t>
+            </a:r>
+          </a:p>
+        </p:txBody>
+      </p:sp>
+    </p:spTree>
+  </p:cSld>
+  <p:clrMapOvr>
+    <a:masterClrMapping/>
+  </p:clrMapOvr>
+</p:sld>
+</file>
+
+<file path=ppt/slides/slide16.xml><?xml version="1.0" encoding="utf-8"?>
+<p:sld xmlns:a="http://schemas.openxmlformats.org/drawingml/2006/main" xmlns:r="http://schemas.openxmlformats.org/officeDocument/2006/relationships" xmlns:p="http://schemas.openxmlformats.org/presentationml/2006/main">
+  <p:cSld>
+    <p:spTree>
+      <p:nvGrpSpPr>
+        <p:cNvPr id="1" name=""/>
+        <p:cNvGrpSpPr/>
+        <p:nvPr/>
+      </p:nvGrpSpPr>
+      <p:grpSpPr>
+        <a:xfrm>
+          <a:off x="0" y="0"/>
+          <a:ext cx="0" cy="0"/>
+          <a:chOff x="0" y="0"/>
+          <a:chExt cx="0" cy="0"/>
+        </a:xfrm>
+      </p:grpSpPr>
+      <p:sp>
+        <p:nvSpPr>
+          <p:cNvPr id="6" name="Caixa"/>
+          <p:cNvSpPr txBox="1"/>
+          <p:nvPr/>
+        </p:nvSpPr>
+        <p:spPr>
+          <a:xfrm>
+            <a:off x="881687" y="1506234"/>
+            <a:ext cx="10618651" cy="5021055"/>
+          </a:xfrm>
+          <a:prstGeom prst="rect">
+            <a:avLst/>
+          </a:prstGeom>
+          <a:noFill/>
+        </p:spPr>
+        <p:txBody>
+          <a:bodyPr wrap="square" rtlCol="0">
+            <a:normAutofit/>
+          </a:bodyPr>
+          <a:lstStyle/>
+          <a:p>
+            <a:pPr/>
+            <a:r>
+              <a:rPr lang="pt-BR" sz="2400" b="1" dirty="0"/>
+              <a:t>Atividades referentes à aula</a:t>
+            </a:r>
+          </a:p>
+          <a:p>
+            <a:endParaRPr lang="pt-BR" sz="2400" dirty="0"/>
+          </a:p>
+          <a:p>
+            <a:pPr/>
+            <a:r>
+              <a:rPr lang="pt-BR" sz="2000" b="1" dirty="0"/>
+              <a:t>Leitura recomendada:</a:t>
+            </a:r>
+          </a:p>
+          <a:p>
+            <a:pPr marL="342900" indent="-342900">
+              <a:buFont typeface="Arial" panose="020B0604020202020204" pitchFamily="34" charset="0"/>
+              <a:buChar char="•"/>
+            </a:pPr>
+            <a:r>
+              <a:rPr lang="pt-BR" sz="1800" dirty="0"/>
+              <a:t>Bussab &amp; Morettin — Cap. 7: 7.7.2 e 7.7.3 (distribuições t e qui-quadrado)</a:t>
+            </a:r>
+          </a:p>
+          <a:p>
+            <a:pPr marL="342900" indent="-342900">
+              <a:buFont typeface="Arial" panose="020B0604020202020204" pitchFamily="34" charset="0"/>
+              <a:buChar char="•"/>
+            </a:pPr>
+            <a:r>
+              <a:rPr lang="pt-BR" sz="1800" dirty="0"/>
+              <a:t>Montgomery &amp; Runger — Cap. 8: 8.2.1</a:t>
+            </a:r>
+          </a:p>
+          <a:p>
+            <a:pPr marL="342900" indent="-342900">
+              <a:buFont typeface="Arial" panose="020B0604020202020204" pitchFamily="34" charset="0"/>
+              <a:buChar char="•"/>
+            </a:pPr>
+            <a:r>
+              <a:rPr lang="pt-BR" sz="1800" dirty="0"/>
+              <a:t>Magalhães &amp; Lima — Cap. 7: 7.4; Cap. 8: 8.5</a:t>
+            </a:r>
+          </a:p>
+          <a:p>
+            <a:pPr marL="342900" indent="-342900">
+              <a:buFont typeface="Arial" panose="020B0604020202020204" pitchFamily="34" charset="0"/>
+              <a:buChar char="•"/>
+            </a:pPr>
+            <a:r>
+              <a:rPr lang="pt-BR" sz="1800" dirty="0"/>
+              <a:t>Morettin (Prob. e Inf.) — Cap. 14: 14.1; Cap. 16: 16.1</a:t>
+            </a:r>
+          </a:p>
+          <a:p>
+            <a:endParaRPr lang="pt-BR" sz="1800" dirty="0"/>
+          </a:p>
+          <a:p>
+            <a:pPr/>
+            <a:r>
+              <a:rPr lang="pt-BR" sz="2000" b="1" dirty="0"/>
+              <a:t>Exercícios recomendados:</a:t>
+            </a:r>
+          </a:p>
+          <a:p>
+            <a:pPr marL="342900" indent="-342900">
+              <a:buFont typeface="Arial" panose="020B0604020202020204" pitchFamily="34" charset="0"/>
+              <a:buChar char="•"/>
+            </a:pPr>
+            <a:r>
+              <a:rPr lang="pt-BR" sz="1800" dirty="0"/>
+              <a:t>Pratique a leitura da tabela t e da tabela qui-quadrado para diferentes graus de liberdade e níveis de significância (α = 0,10; 0,05; 0,01).</a:t>
+            </a:r>
+          </a:p>
+          <a:p>
+            <a:pPr marL="342900" indent="-342900">
+              <a:buFont typeface="Arial" panose="020B0604020202020204" pitchFamily="34" charset="0"/>
+              <a:buChar char="•"/>
+            </a:pPr>
+            <a:r>
+              <a:rPr lang="pt-BR" sz="1800" dirty="0"/>
+              <a:t>Refaça o exemplo do processo de fabricação com S² = 0,0030 mm² e compare a conclusão.</a:t>
+            </a:r>
+          </a:p>
+        </p:txBody>
+      </p:sp>
+      <p:sp>
+        <p:nvSpPr>
+          <p:cNvPr id="3" name="CaixaDeTexto 2"/>
+          <p:cNvSpPr txBox="1"/>
+          <p:nvPr/>
+        </p:nvSpPr>
+        <p:spPr>
+          <a:xfrm>
+            <a:off x="361395" y="6488668"/>
+            <a:ext cx="7620000" cy="300210"/>
+          </a:xfrm>
+          <a:prstGeom prst="rect">
+            <a:avLst/>
+          </a:prstGeom>
+          <a:noFill/>
+        </p:spPr>
+        <p:txBody>
+          <a:bodyPr wrap="none" rtlCol="0">
+            <a:spAutoFit/>
+          </a:bodyPr>
+          <a:lstStyle/>
+          <a:p>
+            <a:r>
+              <a:rPr lang="pt-BR" sz="1351" dirty="0"/>
+              <a:t>CEA055 - Estatística e Probabilidade - Professor: Marcos Goulart Lima</a:t>
+            </a:r>
+          </a:p>
+        </p:txBody>
+      </p:sp>
+    </p:spTree>
+  </p:cSld>
+  <p:clrMapOvr>
+    <a:masterClrMapping/>
+  </p:clrMapOvr>
+</p:sld>
+</file>
+
+<file path=ppt/slides/slide2.xml><?xml version="1.0" encoding="utf-8"?>
+<p:sld xmlns:a="http://schemas.openxmlformats.org/drawingml/2006/main" xmlns:r="http://schemas.openxmlformats.org/officeDocument/2006/relationships" xmlns:p="http://schemas.openxmlformats.org/presentationml/2006/main">
+  <p:cSld>
+    <p:spTree>
+      <p:nvGrpSpPr>
+        <p:cNvPr id="1" name=""/>
+        <p:cNvGrpSpPr/>
+        <p:nvPr/>
+      </p:nvGrpSpPr>
+      <p:grpSpPr>
+        <a:xfrm>
+          <a:off x="0" y="0"/>
+          <a:ext cx="0" cy="0"/>
+          <a:chOff x="0" y="0"/>
+          <a:chExt cx="0" cy="0"/>
+        </a:xfrm>
+      </p:grpSpPr>
       <mc:AlternateContent xmlns:mc="http://schemas.openxmlformats.org/markup-compatibility/2006">
         <mc:Choice xmlns:a14="http://schemas.microsoft.com/office/drawing/2010/main" Requires="a14">
           <p:sp>
@@ -4623,7 +5782,7 @@
         <p:spPr>
           <a:xfrm>
             <a:off x="361395" y="6488668"/>
-            <a:ext cx="2395336" cy="300210"/>
+            <a:ext cx="7620000" cy="300210"/>
           </a:xfrm>
           <a:prstGeom prst="rect">
             <a:avLst/>
@@ -4638,47 +5797,11 @@
           <a:p>
             <a:r>
               <a:rPr lang="pt-BR" sz="1351" dirty="0"/>
-              <a:t>Professor: Marcos Goulart Lima</a:t>
-            </a:r>
-          </a:p>
-        </p:txBody>
-      </p:sp>
-      <p:pic>
-        <p:nvPicPr>
-          <p:cNvPr id="8" name="Espaço Reservado para Conteúdo 4">
-            <a:extLst>
-              <a:ext uri="{FF2B5EF4-FFF2-40B4-BE49-F238E27FC236}">
-                <a16:creationId xmlns:a16="http://schemas.microsoft.com/office/drawing/2014/main" id="{65AB402D-D1A8-4F31-BA42-34A6F0FC69F9}"/>
-              </a:ext>
-            </a:extLst>
-          </p:cNvPr>
-          <p:cNvPicPr>
-            <a:picLocks noChangeAspect="1"/>
-          </p:cNvPicPr>
-          <p:nvPr/>
-        </p:nvPicPr>
-        <p:blipFill>
-          <a:blip r:embed="rId3">
-            <a:extLst>
-              <a:ext uri="{28A0092B-C50C-407E-A947-70E740481C1C}">
-                <a14:useLocalDpi xmlns:a14="http://schemas.microsoft.com/office/drawing/2010/main" val="0"/>
-              </a:ext>
-            </a:extLst>
-          </a:blip>
-          <a:stretch>
-            <a:fillRect/>
-          </a:stretch>
-        </p:blipFill>
-        <p:spPr>
-          <a:xfrm>
-            <a:off x="62144" y="112237"/>
-            <a:ext cx="588096" cy="1228523"/>
-          </a:xfrm>
-          <a:prstGeom prst="rect">
-            <a:avLst/>
-          </a:prstGeom>
-        </p:spPr>
-      </p:pic>
+              <a:t>CEA055 - Estatística e Probabilidade - Professor: Marcos Goulart Lima</a:t>
+            </a:r>
+          </a:p>
+        </p:txBody>
+      </p:sp>
     </p:spTree>
     <p:extLst>
       <p:ext uri="{BB962C8B-B14F-4D97-AF65-F5344CB8AC3E}">
@@ -4692,7 +5815,7 @@
 </p:sld>
 </file>
 
-<file path=ppt/slides/slide10.xml><?xml version="1.0" encoding="utf-8"?>
+<file path=ppt/slides/slide3.xml><?xml version="1.0" encoding="utf-8"?>
 <p:sld xmlns:a="http://schemas.openxmlformats.org/drawingml/2006/main" xmlns:r="http://schemas.openxmlformats.org/officeDocument/2006/relationships" xmlns:p="http://schemas.openxmlformats.org/presentationml/2006/main">
   <p:cSld>
     <p:spTree>
@@ -4709,1472 +5832,6 @@
           <a:chExt cx="0" cy="0"/>
         </a:xfrm>
       </p:grpSpPr>
-      <p:sp>
-        <p:nvSpPr>
-          <p:cNvPr id="2" name="Título 1"/>
-          <p:cNvSpPr>
-            <a:spLocks noGrp="1"/>
-          </p:cNvSpPr>
-          <p:nvPr>
-            <p:ph type="title"/>
-          </p:nvPr>
-        </p:nvSpPr>
-        <p:spPr>
-          <a:xfrm>
-            <a:off x="1032611" y="0"/>
-            <a:ext cx="10827959" cy="900000"/>
-          </a:xfrm>
-        </p:spPr>
-        <p:txBody>
-          <a:bodyPr>
-            <a:normAutofit/>
-          </a:bodyPr>
-          <a:lstStyle/>
-          <a:p>
-            <a:pPr algn="ctr"/>
-            <a:r>
-              <a:rPr lang="pt-BR" dirty="0">
-                <a:latin typeface="AlternateGothic2 BT" panose="020B0608020202050204" pitchFamily="34" charset="0"/>
-              </a:rPr>
-              <a:t>CEA055 – Estatística e Probabilidade</a:t>
-            </a:r>
-            <a:br>
-              <a:rPr lang="pt-BR" dirty="0">
-                <a:latin typeface="AlternateGothic2 BT" panose="020B0608020202050204" pitchFamily="34" charset="0"/>
-              </a:rPr>
-            </a:br>
-            <a:r>
-              <a:rPr lang="pt-BR" sz="1800" b="1" dirty="0"/>
-              <a:t>T-Student e Qui-Quadrado</a:t>
-            </a:r>
-            <a:endParaRPr lang="pt-BR" dirty="0">
-              <a:latin typeface="AlternateGothic2 BT" panose="020B0608020202050204" pitchFamily="34" charset="0"/>
-            </a:endParaRPr>
-          </a:p>
-        </p:txBody>
-      </p:sp>
-      <p:sp>
-        <p:nvSpPr>
-          <p:cNvPr id="6" name="Caixa"/>
-          <p:cNvSpPr txBox="1"/>
-          <p:nvPr/>
-        </p:nvSpPr>
-        <p:spPr>
-          <a:xfrm>
-            <a:off x="685800" y="1150000"/>
-            <a:ext cx="5400000" cy="4900000"/>
-          </a:xfrm>
-          <a:prstGeom prst="rect">
-            <a:avLst/>
-          </a:prstGeom>
-          <a:noFill/>
-        </p:spPr>
-        <p:txBody>
-          <a:bodyPr wrap="square" rtlCol="0">
-            <a:normAutofit/>
-          </a:bodyPr>
-          <a:lstStyle/>
-          <a:p>
-            <a:pPr/>
-            <a:r>
-              <a:rPr lang="pt-BR" sz="2000" b="1" dirty="0"/>
-              <a:t>O formato da curva χ²</a:t>
-            </a:r>
-          </a:p>
-          <a:p>
-            <a:pPr marL="342900" indent="-342900">
-              <a:buFont typeface="Arial" panose="020B0604020202020204" pitchFamily="34" charset="0"/>
-              <a:buChar char="•"/>
-            </a:pPr>
-            <a:r>
-              <a:rPr lang="pt-BR" sz="1600" dirty="0"/>
-              <a:t>Ao contrário da t, a distribuição qui-quadrado não é simétrica — só assume valores positivos (é soma de quadrados).</a:t>
-            </a:r>
-          </a:p>
-          <a:p>
-            <a:pPr marL="342900" indent="-342900">
-              <a:buFont typeface="Arial" panose="020B0604020202020204" pitchFamily="34" charset="0"/>
-              <a:buChar char="•"/>
-            </a:pPr>
-            <a:r>
-              <a:rPr lang="pt-BR" sz="1600" dirty="0"/>
-              <a:t>Para poucos graus de liberdade, a curva é bastante assimétrica à direita.</a:t>
-            </a:r>
-          </a:p>
-          <a:p>
-            <a:pPr marL="342900" indent="-342900">
-              <a:buFont typeface="Arial" panose="020B0604020202020204" pitchFamily="34" charset="0"/>
-              <a:buChar char="•"/>
-            </a:pPr>
-            <a:r>
-              <a:rPr lang="pt-BR" sz="1600" dirty="0"/>
-              <a:t>À medida que ν cresce, a curva fica mais simétrica e se aproxima do formato de uma Normal.</a:t>
-            </a:r>
-          </a:p>
-        </p:txBody>
-      </p:sp>
-      <p:pic>
-        <p:nvPicPr>
-          <p:cNvPr id="9" name="Curvas qui-quadrado"/>
-          <p:cNvPicPr>
-            <a:picLocks noChangeAspect="1"/>
-          </p:cNvPicPr>
-          <p:nvPr/>
-        </p:nvPicPr>
-        <p:blipFill>
-          <a:blip r:embed="rId4"/>
-          <a:stretch>
-            <a:fillRect/>
-          </a:stretch>
-        </p:blipFill>
-        <p:spPr>
-          <a:xfrm>
-            <a:off x="6300000" y="1500000"/>
-            <a:ext cx="4900000" cy="3050000"/>
-          </a:xfrm>
-          <a:prstGeom prst="rect">
-            <a:avLst/>
-          </a:prstGeom>
-        </p:spPr>
-      </p:pic>
-      <p:sp>
-        <p:nvSpPr>
-          <p:cNvPr id="3" name="CaixaDeTexto 2"/>
-          <p:cNvSpPr txBox="1"/>
-          <p:nvPr/>
-        </p:nvSpPr>
-        <p:spPr>
-          <a:xfrm>
-            <a:off x="361395" y="6488668"/>
-            <a:ext cx="2395336" cy="300210"/>
-          </a:xfrm>
-          <a:prstGeom prst="rect">
-            <a:avLst/>
-          </a:prstGeom>
-          <a:noFill/>
-        </p:spPr>
-        <p:txBody>
-          <a:bodyPr wrap="none" rtlCol="0">
-            <a:spAutoFit/>
-          </a:bodyPr>
-          <a:lstStyle/>
-          <a:p>
-            <a:r>
-              <a:rPr lang="pt-BR" sz="1351" dirty="0"/>
-              <a:t>Professor: Marcos Goulart Lima</a:t>
-            </a:r>
-          </a:p>
-        </p:txBody>
-      </p:sp>
-      <p:pic>
-        <p:nvPicPr>
-          <p:cNvPr id="8" name="Logo UFOP"/>
-          <p:cNvPicPr>
-            <a:picLocks noChangeAspect="1"/>
-          </p:cNvPicPr>
-          <p:nvPr/>
-        </p:nvPicPr>
-        <p:blipFill>
-          <a:blip r:embed="rId3"/>
-          <a:stretch>
-            <a:fillRect/>
-          </a:stretch>
-        </p:blipFill>
-        <p:spPr>
-          <a:xfrm>
-            <a:off x="62144" y="112237"/>
-            <a:ext cx="588096" cy="1228523"/>
-          </a:xfrm>
-          <a:prstGeom prst="rect">
-            <a:avLst/>
-          </a:prstGeom>
-        </p:spPr>
-      </p:pic>
-    </p:spTree>
-  </p:cSld>
-  <p:clrMapOvr>
-    <a:masterClrMapping/>
-  </p:clrMapOvr>
-</p:sld>
-</file>
-
-<file path=ppt/slides/slide11.xml><?xml version="1.0" encoding="utf-8"?>
-<p:sld xmlns:a="http://schemas.openxmlformats.org/drawingml/2006/main" xmlns:r="http://schemas.openxmlformats.org/officeDocument/2006/relationships" xmlns:p="http://schemas.openxmlformats.org/presentationml/2006/main">
-  <p:cSld>
-    <p:spTree>
-      <p:nvGrpSpPr>
-        <p:cNvPr id="1" name=""/>
-        <p:cNvGrpSpPr/>
-        <p:nvPr/>
-      </p:nvGrpSpPr>
-      <p:grpSpPr>
-        <a:xfrm>
-          <a:off x="0" y="0"/>
-          <a:ext cx="0" cy="0"/>
-          <a:chOff x="0" y="0"/>
-          <a:chExt cx="0" cy="0"/>
-        </a:xfrm>
-      </p:grpSpPr>
-      <p:sp>
-        <p:nvSpPr>
-          <p:cNvPr id="2" name="Título 1"/>
-          <p:cNvSpPr>
-            <a:spLocks noGrp="1"/>
-          </p:cNvSpPr>
-          <p:nvPr>
-            <p:ph type="title"/>
-          </p:nvPr>
-        </p:nvSpPr>
-        <p:spPr>
-          <a:xfrm>
-            <a:off x="1032611" y="0"/>
-            <a:ext cx="10827959" cy="900000"/>
-          </a:xfrm>
-        </p:spPr>
-        <p:txBody>
-          <a:bodyPr>
-            <a:normAutofit/>
-          </a:bodyPr>
-          <a:lstStyle/>
-          <a:p>
-            <a:pPr algn="ctr"/>
-            <a:r>
-              <a:rPr lang="pt-BR" dirty="0">
-                <a:latin typeface="AlternateGothic2 BT" panose="020B0608020202050204" pitchFamily="34" charset="0"/>
-              </a:rPr>
-              <a:t>CEA055 – Estatística e Probabilidade</a:t>
-            </a:r>
-            <a:br>
-              <a:rPr lang="pt-BR" dirty="0">
-                <a:latin typeface="AlternateGothic2 BT" panose="020B0608020202050204" pitchFamily="34" charset="0"/>
-              </a:rPr>
-            </a:br>
-            <a:r>
-              <a:rPr lang="pt-BR" sz="1800" b="1" dirty="0"/>
-              <a:t>T-Student e Qui-Quadrado</a:t>
-            </a:r>
-            <a:endParaRPr lang="pt-BR" dirty="0">
-              <a:latin typeface="AlternateGothic2 BT" panose="020B0608020202050204" pitchFamily="34" charset="0"/>
-            </a:endParaRPr>
-          </a:p>
-        </p:txBody>
-      </p:sp>
-      <p:pic>
-        <p:nvPicPr>
-          <p:cNvPr id="9" name="Tabela qui-quadrado"/>
-          <p:cNvPicPr>
-            <a:picLocks noChangeAspect="1"/>
-          </p:cNvPicPr>
-          <p:nvPr/>
-        </p:nvPicPr>
-        <p:blipFill>
-          <a:blip r:embed="rId4"/>
-          <a:stretch>
-            <a:fillRect/>
-          </a:stretch>
-        </p:blipFill>
-        <p:spPr>
-          <a:xfrm>
-            <a:off x="1596000" y="1200000"/>
-            <a:ext cx="9000000" cy="5477000"/>
-          </a:xfrm>
-          <a:prstGeom prst="rect">
-            <a:avLst/>
-          </a:prstGeom>
-        </p:spPr>
-      </p:pic>
-      <p:sp>
-        <p:nvSpPr>
-          <p:cNvPr id="3" name="CaixaDeTexto 2"/>
-          <p:cNvSpPr txBox="1"/>
-          <p:nvPr/>
-        </p:nvSpPr>
-        <p:spPr>
-          <a:xfrm>
-            <a:off x="361395" y="6488668"/>
-            <a:ext cx="2395336" cy="300210"/>
-          </a:xfrm>
-          <a:prstGeom prst="rect">
-            <a:avLst/>
-          </a:prstGeom>
-          <a:noFill/>
-        </p:spPr>
-        <p:txBody>
-          <a:bodyPr wrap="none" rtlCol="0">
-            <a:spAutoFit/>
-          </a:bodyPr>
-          <a:lstStyle/>
-          <a:p>
-            <a:r>
-              <a:rPr lang="pt-BR" sz="1351" dirty="0"/>
-              <a:t>Professor: Marcos Goulart Lima</a:t>
-            </a:r>
-          </a:p>
-        </p:txBody>
-      </p:sp>
-      <p:pic>
-        <p:nvPicPr>
-          <p:cNvPr id="8" name="Logo UFOP"/>
-          <p:cNvPicPr>
-            <a:picLocks noChangeAspect="1"/>
-          </p:cNvPicPr>
-          <p:nvPr/>
-        </p:nvPicPr>
-        <p:blipFill>
-          <a:blip r:embed="rId3"/>
-          <a:stretch>
-            <a:fillRect/>
-          </a:stretch>
-        </p:blipFill>
-        <p:spPr>
-          <a:xfrm>
-            <a:off x="62144" y="112237"/>
-            <a:ext cx="588096" cy="1228523"/>
-          </a:xfrm>
-          <a:prstGeom prst="rect">
-            <a:avLst/>
-          </a:prstGeom>
-        </p:spPr>
-      </p:pic>
-    </p:spTree>
-  </p:cSld>
-  <p:clrMapOvr>
-    <a:masterClrMapping/>
-  </p:clrMapOvr>
-</p:sld>
-</file>
-
-<file path=ppt/slides/slide12.xml><?xml version="1.0" encoding="utf-8"?>
-<p:sld xmlns:a="http://schemas.openxmlformats.org/drawingml/2006/main" xmlns:r="http://schemas.openxmlformats.org/officeDocument/2006/relationships" xmlns:p="http://schemas.openxmlformats.org/presentationml/2006/main">
-  <p:cSld>
-    <p:spTree>
-      <p:nvGrpSpPr>
-        <p:cNvPr id="1" name=""/>
-        <p:cNvGrpSpPr/>
-        <p:nvPr/>
-      </p:nvGrpSpPr>
-      <p:grpSpPr>
-        <a:xfrm>
-          <a:off x="0" y="0"/>
-          <a:ext cx="0" cy="0"/>
-          <a:chOff x="0" y="0"/>
-          <a:chExt cx="0" cy="0"/>
-        </a:xfrm>
-      </p:grpSpPr>
-      <p:sp>
-        <p:nvSpPr>
-          <p:cNvPr id="2" name="Título 1"/>
-          <p:cNvSpPr>
-            <a:spLocks noGrp="1"/>
-          </p:cNvSpPr>
-          <p:nvPr>
-            <p:ph type="title"/>
-          </p:nvPr>
-        </p:nvSpPr>
-        <p:spPr>
-          <a:xfrm>
-            <a:off x="1032611" y="0"/>
-            <a:ext cx="10827959" cy="900000"/>
-          </a:xfrm>
-        </p:spPr>
-        <p:txBody>
-          <a:bodyPr>
-            <a:normAutofit/>
-          </a:bodyPr>
-          <a:lstStyle/>
-          <a:p>
-            <a:pPr algn="ctr"/>
-            <a:r>
-              <a:rPr lang="pt-BR" dirty="0">
-                <a:latin typeface="AlternateGothic2 BT" panose="020B0608020202050204" pitchFamily="34" charset="0"/>
-              </a:rPr>
-              <a:t>CEA055 – Estatística e Probabilidade</a:t>
-            </a:r>
-            <a:br>
-              <a:rPr lang="pt-BR" dirty="0">
-                <a:latin typeface="AlternateGothic2 BT" panose="020B0608020202050204" pitchFamily="34" charset="0"/>
-              </a:rPr>
-            </a:br>
-            <a:r>
-              <a:rPr lang="pt-BR" sz="1800" b="1" dirty="0"/>
-              <a:t>T-Student e Qui-Quadrado</a:t>
-            </a:r>
-            <a:endParaRPr lang="pt-BR" dirty="0">
-              <a:latin typeface="AlternateGothic2 BT" panose="020B0608020202050204" pitchFamily="34" charset="0"/>
-            </a:endParaRPr>
-          </a:p>
-        </p:txBody>
-      </p:sp>
-      <p:sp>
-        <p:nvSpPr>
-          <p:cNvPr id="6" name="Caixa"/>
-          <p:cNvSpPr txBox="1"/>
-          <p:nvPr/>
-        </p:nvSpPr>
-        <p:spPr>
-          <a:xfrm>
-            <a:off x="685800" y="1150000"/>
-            <a:ext cx="10800000" cy="3900000"/>
-          </a:xfrm>
-          <a:prstGeom prst="rect">
-            <a:avLst/>
-          </a:prstGeom>
-          <a:noFill/>
-        </p:spPr>
-        <p:txBody>
-          <a:bodyPr wrap="square" rtlCol="0">
-            <a:normAutofit/>
-          </a:bodyPr>
-          <a:lstStyle/>
-          <a:p>
-            <a:pPr/>
-            <a:r>
-              <a:rPr lang="pt-BR" sz="2000" b="1" dirty="0"/>
-              <a:t>Como usar a tabela qui-quadrado</a:t>
-            </a:r>
-          </a:p>
-          <a:p>
-            <a:endParaRPr lang="pt-BR" sz="1800" dirty="0"/>
-          </a:p>
-          <a:p>
-            <a:pPr marL="342900" indent="-342900">
-              <a:buFont typeface="Arial" panose="020B0604020202020204" pitchFamily="34" charset="0"/>
-              <a:buChar char="•"/>
-            </a:pPr>
-            <a:r>
-              <a:rPr lang="pt-BR" sz="1700" dirty="0"/>
-              <a:t>Passo 1. Determine os graus de liberdade ν = n − 1.</a:t>
-            </a:r>
-          </a:p>
-          <a:p>
-            <a:pPr marL="342900" indent="-342900">
-              <a:buFont typeface="Arial" panose="020B0604020202020204" pitchFamily="34" charset="0"/>
-              <a:buChar char="•"/>
-            </a:pPr>
-            <a:r>
-              <a:rPr lang="pt-BR" sz="1700" dirty="0"/>
-              <a:t>Passo 2. Fixe a probabilidade de interesse p (ou α).</a:t>
-            </a:r>
-          </a:p>
-          <a:p>
-            <a:pPr marL="342900" indent="-342900">
-              <a:buFont typeface="Arial" panose="020B0604020202020204" pitchFamily="34" charset="0"/>
-              <a:buChar char="•"/>
-            </a:pPr>
-            <a:r>
-              <a:rPr lang="pt-BR" sz="1700" dirty="0"/>
-              <a:t>Passo 3. Localize a linha ν e a coluna p na tabela; o valor encontrado é χ²_c, tal que:</a:t>
-            </a:r>
-          </a:p>
-        </p:txBody>
-      </p:sp>
-      <p:pic>
-        <p:nvPicPr>
-          <p:cNvPr id="9" name="P(chi2 &gt; chi2c) = alfa"/>
-          <p:cNvPicPr>
-            <a:picLocks noChangeAspect="1"/>
-          </p:cNvPicPr>
-          <p:nvPr/>
-        </p:nvPicPr>
-        <p:blipFill>
-          <a:blip r:embed="rId4"/>
-          <a:stretch>
-            <a:fillRect/>
-          </a:stretch>
-        </p:blipFill>
-        <p:spPr>
-          <a:xfrm>
-            <a:off x="3400000" y="4700000"/>
-            <a:ext cx="5400000" cy="1150000"/>
-          </a:xfrm>
-          <a:prstGeom prst="rect">
-            <a:avLst/>
-          </a:prstGeom>
-        </p:spPr>
-      </p:pic>
-      <p:sp>
-        <p:nvSpPr>
-          <p:cNvPr id="3" name="CaixaDeTexto 2"/>
-          <p:cNvSpPr txBox="1"/>
-          <p:nvPr/>
-        </p:nvSpPr>
-        <p:spPr>
-          <a:xfrm>
-            <a:off x="361395" y="6488668"/>
-            <a:ext cx="2395336" cy="300210"/>
-          </a:xfrm>
-          <a:prstGeom prst="rect">
-            <a:avLst/>
-          </a:prstGeom>
-          <a:noFill/>
-        </p:spPr>
-        <p:txBody>
-          <a:bodyPr wrap="none" rtlCol="0">
-            <a:spAutoFit/>
-          </a:bodyPr>
-          <a:lstStyle/>
-          <a:p>
-            <a:r>
-              <a:rPr lang="pt-BR" sz="1351" dirty="0"/>
-              <a:t>Professor: Marcos Goulart Lima</a:t>
-            </a:r>
-          </a:p>
-        </p:txBody>
-      </p:sp>
-      <p:pic>
-        <p:nvPicPr>
-          <p:cNvPr id="8" name="Logo UFOP"/>
-          <p:cNvPicPr>
-            <a:picLocks noChangeAspect="1"/>
-          </p:cNvPicPr>
-          <p:nvPr/>
-        </p:nvPicPr>
-        <p:blipFill>
-          <a:blip r:embed="rId3"/>
-          <a:stretch>
-            <a:fillRect/>
-          </a:stretch>
-        </p:blipFill>
-        <p:spPr>
-          <a:xfrm>
-            <a:off x="62144" y="112237"/>
-            <a:ext cx="588096" cy="1228523"/>
-          </a:xfrm>
-          <a:prstGeom prst="rect">
-            <a:avLst/>
-          </a:prstGeom>
-        </p:spPr>
-      </p:pic>
-    </p:spTree>
-  </p:cSld>
-  <p:clrMapOvr>
-    <a:masterClrMapping/>
-  </p:clrMapOvr>
-</p:sld>
-</file>
-
-<file path=ppt/slides/slide13.xml><?xml version="1.0" encoding="utf-8"?>
-<p:sld xmlns:a="http://schemas.openxmlformats.org/drawingml/2006/main" xmlns:r="http://schemas.openxmlformats.org/officeDocument/2006/relationships" xmlns:p="http://schemas.openxmlformats.org/presentationml/2006/main">
-  <p:cSld>
-    <p:spTree>
-      <p:nvGrpSpPr>
-        <p:cNvPr id="1" name=""/>
-        <p:cNvGrpSpPr/>
-        <p:nvPr/>
-      </p:nvGrpSpPr>
-      <p:grpSpPr>
-        <a:xfrm>
-          <a:off x="0" y="0"/>
-          <a:ext cx="0" cy="0"/>
-          <a:chOff x="0" y="0"/>
-          <a:chExt cx="0" cy="0"/>
-        </a:xfrm>
-      </p:grpSpPr>
-      <p:sp>
-        <p:nvSpPr>
-          <p:cNvPr id="2" name="Título 1"/>
-          <p:cNvSpPr>
-            <a:spLocks noGrp="1"/>
-          </p:cNvSpPr>
-          <p:nvPr>
-            <p:ph type="title"/>
-          </p:nvPr>
-        </p:nvSpPr>
-        <p:spPr>
-          <a:xfrm>
-            <a:off x="1032611" y="0"/>
-            <a:ext cx="10827959" cy="900000"/>
-          </a:xfrm>
-        </p:spPr>
-        <p:txBody>
-          <a:bodyPr>
-            <a:normAutofit/>
-          </a:bodyPr>
-          <a:lstStyle/>
-          <a:p>
-            <a:pPr algn="ctr"/>
-            <a:r>
-              <a:rPr lang="pt-BR" dirty="0">
-                <a:latin typeface="AlternateGothic2 BT" panose="020B0608020202050204" pitchFamily="34" charset="0"/>
-              </a:rPr>
-              <a:t>CEA055 – Estatística e Probabilidade</a:t>
-            </a:r>
-            <a:br>
-              <a:rPr lang="pt-BR" dirty="0">
-                <a:latin typeface="AlternateGothic2 BT" panose="020B0608020202050204" pitchFamily="34" charset="0"/>
-              </a:rPr>
-            </a:br>
-            <a:r>
-              <a:rPr lang="pt-BR" sz="1800" b="1" dirty="0"/>
-              <a:t>T-Student e Qui-Quadrado</a:t>
-            </a:r>
-            <a:endParaRPr lang="pt-BR" dirty="0">
-              <a:latin typeface="AlternateGothic2 BT" panose="020B0608020202050204" pitchFamily="34" charset="0"/>
-            </a:endParaRPr>
-          </a:p>
-        </p:txBody>
-      </p:sp>
-      <p:sp>
-        <p:nvSpPr>
-          <p:cNvPr id="6" name="Caixa"/>
-          <p:cNvSpPr txBox="1"/>
-          <p:nvPr/>
-        </p:nvSpPr>
-        <p:spPr>
-          <a:xfrm>
-            <a:off x="685800" y="1150000"/>
-            <a:ext cx="10800000" cy="5100000"/>
-          </a:xfrm>
-          <a:prstGeom prst="rect">
-            <a:avLst/>
-          </a:prstGeom>
-          <a:noFill/>
-        </p:spPr>
-        <p:txBody>
-          <a:bodyPr wrap="square" rtlCol="0">
-            <a:normAutofit/>
-          </a:bodyPr>
-          <a:lstStyle/>
-          <a:p>
-            <a:pPr/>
-            <a:r>
-              <a:rPr lang="pt-BR" sz="2000" b="1" dirty="0"/>
-              <a:t>Exemplo: variância de um processo de fabricação</a:t>
-            </a:r>
-          </a:p>
-          <a:p>
-            <a:endParaRPr lang="pt-BR" sz="1800" dirty="0"/>
-          </a:p>
-          <a:p>
-            <a:pPr/>
-            <a:r>
-              <a:rPr lang="pt-BR" sz="1700" dirty="0"/>
-              <a:t>Uma fábrica de parafusos afirma que o diâmetro de suas peças tem desvio padrão de no máximo 0,04 mm. Uma amostra de n = 20 parafusos apresentou variância amostral S² = 0,0021 mm².</a:t>
-            </a:r>
-          </a:p>
-          <a:p>
-            <a:endParaRPr lang="pt-BR" sz="1800" dirty="0"/>
-          </a:p>
-          <a:p>
-            <a:pPr marL="342900" indent="-342900">
-              <a:buFont typeface="Arial" panose="020B0604020202020204" pitchFamily="34" charset="0"/>
-              <a:buChar char="•"/>
-            </a:pPr>
-            <a:r>
-              <a:rPr lang="pt-BR" sz="1700" dirty="0"/>
-              <a:t>A estatística do teste é χ² = (n − 1)S² / σ²₀, com σ²₀ = 0,04² = 0,0016 e ν = 19 graus de liberdade.</a:t>
-            </a:r>
-          </a:p>
-          <a:p>
-            <a:pPr marL="342900" indent="-342900">
-              <a:buFont typeface="Arial" panose="020B0604020202020204" pitchFamily="34" charset="0"/>
-              <a:buChar char="•"/>
-            </a:pPr>
-            <a:r>
-              <a:rPr lang="pt-BR" sz="1700" dirty="0"/>
-              <a:t>Substituindo: χ² = 19 × 0,0021 / 0,0016 = 24,94.</a:t>
-            </a:r>
-          </a:p>
-          <a:p>
-            <a:pPr marL="342900" indent="-342900">
-              <a:buFont typeface="Arial" panose="020B0604020202020204" pitchFamily="34" charset="0"/>
-              <a:buChar char="•"/>
-            </a:pPr>
-            <a:r>
-              <a:rPr lang="pt-BR" sz="1700" dirty="0"/>
-              <a:t>Consultando a tabela com ν = 19 e p = 0,05, obtemos χ²_c = 30,144.</a:t>
-            </a:r>
-          </a:p>
-          <a:p>
-            <a:pPr marL="342900" indent="-342900">
-              <a:buFont typeface="Arial" panose="020B0604020202020204" pitchFamily="34" charset="0"/>
-              <a:buChar char="•"/>
-            </a:pPr>
-            <a:r>
-              <a:rPr lang="pt-BR" sz="1700" dirty="0"/>
-              <a:t>Como χ² = 24,94 &lt; 30,144, o valor observado é compatível com a afirmação do fabricante — não há evidência de que a variabilidade seja maior que a declarada.</a:t>
-            </a:r>
-          </a:p>
-        </p:txBody>
-      </p:sp>
-      <p:sp>
-        <p:nvSpPr>
-          <p:cNvPr id="3" name="CaixaDeTexto 2"/>
-          <p:cNvSpPr txBox="1"/>
-          <p:nvPr/>
-        </p:nvSpPr>
-        <p:spPr>
-          <a:xfrm>
-            <a:off x="361395" y="6488668"/>
-            <a:ext cx="2395336" cy="300210"/>
-          </a:xfrm>
-          <a:prstGeom prst="rect">
-            <a:avLst/>
-          </a:prstGeom>
-          <a:noFill/>
-        </p:spPr>
-        <p:txBody>
-          <a:bodyPr wrap="none" rtlCol="0">
-            <a:spAutoFit/>
-          </a:bodyPr>
-          <a:lstStyle/>
-          <a:p>
-            <a:r>
-              <a:rPr lang="pt-BR" sz="1351" dirty="0"/>
-              <a:t>Professor: Marcos Goulart Lima</a:t>
-            </a:r>
-          </a:p>
-        </p:txBody>
-      </p:sp>
-      <p:pic>
-        <p:nvPicPr>
-          <p:cNvPr id="8" name="Logo UFOP"/>
-          <p:cNvPicPr>
-            <a:picLocks noChangeAspect="1"/>
-          </p:cNvPicPr>
-          <p:nvPr/>
-        </p:nvPicPr>
-        <p:blipFill>
-          <a:blip r:embed="rId3"/>
-          <a:stretch>
-            <a:fillRect/>
-          </a:stretch>
-        </p:blipFill>
-        <p:spPr>
-          <a:xfrm>
-            <a:off x="62144" y="112237"/>
-            <a:ext cx="588096" cy="1228523"/>
-          </a:xfrm>
-          <a:prstGeom prst="rect">
-            <a:avLst/>
-          </a:prstGeom>
-        </p:spPr>
-      </p:pic>
-    </p:spTree>
-  </p:cSld>
-  <p:clrMapOvr>
-    <a:masterClrMapping/>
-  </p:clrMapOvr>
-</p:sld>
-</file>
-
-<file path=ppt/slides/slide14.xml><?xml version="1.0" encoding="utf-8"?>
-<p:sld xmlns:a="http://schemas.openxmlformats.org/drawingml/2006/main" xmlns:r="http://schemas.openxmlformats.org/officeDocument/2006/relationships" xmlns:p="http://schemas.openxmlformats.org/presentationml/2006/main">
-  <p:cSld>
-    <p:spTree>
-      <p:nvGrpSpPr>
-        <p:cNvPr id="1" name=""/>
-        <p:cNvGrpSpPr/>
-        <p:nvPr/>
-      </p:nvGrpSpPr>
-      <p:grpSpPr>
-        <a:xfrm>
-          <a:off x="0" y="0"/>
-          <a:ext cx="0" cy="0"/>
-          <a:chOff x="0" y="0"/>
-          <a:chExt cx="0" cy="0"/>
-        </a:xfrm>
-      </p:grpSpPr>
-      <p:sp>
-        <p:nvSpPr>
-          <p:cNvPr id="2" name="Título 1"/>
-          <p:cNvSpPr>
-            <a:spLocks noGrp="1"/>
-          </p:cNvSpPr>
-          <p:nvPr>
-            <p:ph type="title"/>
-          </p:nvPr>
-        </p:nvSpPr>
-        <p:spPr>
-          <a:xfrm>
-            <a:off x="1032611" y="0"/>
-            <a:ext cx="10827959" cy="900000"/>
-          </a:xfrm>
-        </p:spPr>
-        <p:txBody>
-          <a:bodyPr>
-            <a:normAutofit/>
-          </a:bodyPr>
-          <a:lstStyle/>
-          <a:p>
-            <a:pPr algn="ctr"/>
-            <a:r>
-              <a:rPr lang="pt-BR" dirty="0">
-                <a:latin typeface="AlternateGothic2 BT" panose="020B0608020202050204" pitchFamily="34" charset="0"/>
-              </a:rPr>
-              <a:t>CEA055 – Estatística e Probabilidade</a:t>
-            </a:r>
-            <a:br>
-              <a:rPr lang="pt-BR" dirty="0">
-                <a:latin typeface="AlternateGothic2 BT" panose="020B0608020202050204" pitchFamily="34" charset="0"/>
-              </a:rPr>
-            </a:br>
-            <a:r>
-              <a:rPr lang="pt-BR" sz="1800" b="1" dirty="0"/>
-              <a:t>T-Student e Qui-Quadrado</a:t>
-            </a:r>
-            <a:endParaRPr lang="pt-BR" dirty="0">
-              <a:latin typeface="AlternateGothic2 BT" panose="020B0608020202050204" pitchFamily="34" charset="0"/>
-            </a:endParaRPr>
-          </a:p>
-        </p:txBody>
-      </p:sp>
-      <p:sp>
-        <p:nvSpPr>
-          <p:cNvPr id="6" name="Caixa"/>
-          <p:cNvSpPr txBox="1"/>
-          <p:nvPr/>
-        </p:nvSpPr>
-        <p:spPr>
-          <a:xfrm>
-            <a:off x="685800" y="1150000"/>
-            <a:ext cx="10800000" cy="2100000"/>
-          </a:xfrm>
-          <a:prstGeom prst="rect">
-            <a:avLst/>
-          </a:prstGeom>
-          <a:noFill/>
-        </p:spPr>
-        <p:txBody>
-          <a:bodyPr wrap="square" rtlCol="0">
-            <a:normAutofit/>
-          </a:bodyPr>
-          <a:lstStyle/>
-          <a:p>
-            <a:pPr/>
-            <a:r>
-              <a:rPr lang="pt-BR" sz="2000" b="1" dirty="0"/>
-              <a:t>Como as três distribuições se conectam</a:t>
-            </a:r>
-          </a:p>
-          <a:p>
-            <a:pPr/>
-            <a:r>
-              <a:rPr lang="pt-BR" sz="1700" dirty="0"/>
-              <a:t>A distribuição t-Student pode ser construída a partir de uma Normal padrão Z e de uma qui-quadrado independente:</a:t>
-            </a:r>
-          </a:p>
-        </p:txBody>
-      </p:sp>
-      <p:pic>
-        <p:nvPicPr>
-          <p:cNvPr id="9" name="T = Z / raiz(chi2/(n-1))"/>
-          <p:cNvPicPr>
-            <a:picLocks noChangeAspect="1"/>
-          </p:cNvPicPr>
-          <p:nvPr/>
-        </p:nvPicPr>
-        <p:blipFill>
-          <a:blip r:embed="rId4"/>
-          <a:stretch>
-            <a:fillRect/>
-          </a:stretch>
-        </p:blipFill>
-        <p:spPr>
-          <a:xfrm>
-            <a:off x="3000000" y="3150000"/>
-            <a:ext cx="6200000" cy="1300000"/>
-          </a:xfrm>
-          <a:prstGeom prst="rect">
-            <a:avLst/>
-          </a:prstGeom>
-        </p:spPr>
-      </p:pic>
-      <p:sp>
-        <p:nvSpPr>
-          <p:cNvPr id="11" name="Caixa"/>
-          <p:cNvSpPr txBox="1"/>
-          <p:nvPr/>
-        </p:nvSpPr>
-        <p:spPr>
-          <a:xfrm>
-            <a:off x="685800" y="4750000"/>
-            <a:ext cx="10800000" cy="1700000"/>
-          </a:xfrm>
-          <a:prstGeom prst="rect">
-            <a:avLst/>
-          </a:prstGeom>
-          <a:noFill/>
-        </p:spPr>
-        <p:txBody>
-          <a:bodyPr wrap="square" rtlCol="0">
-            <a:normAutofit/>
-          </a:bodyPr>
-          <a:lstStyle/>
-          <a:p>
-            <a:pPr/>
-            <a:r>
-              <a:rPr lang="pt-BR" sz="1600" i="1" dirty="0"/>
-              <a:t>Isso mostra por que a t tem caudas mais pesadas: ela “herda” a variabilidade extra de estimar σ² pela χ² amostral, além da própria variabilidade de Z.</a:t>
-            </a:r>
-          </a:p>
-        </p:txBody>
-      </p:sp>
-      <p:sp>
-        <p:nvSpPr>
-          <p:cNvPr id="3" name="CaixaDeTexto 2"/>
-          <p:cNvSpPr txBox="1"/>
-          <p:nvPr/>
-        </p:nvSpPr>
-        <p:spPr>
-          <a:xfrm>
-            <a:off x="361395" y="6488668"/>
-            <a:ext cx="2395336" cy="300210"/>
-          </a:xfrm>
-          <a:prstGeom prst="rect">
-            <a:avLst/>
-          </a:prstGeom>
-          <a:noFill/>
-        </p:spPr>
-        <p:txBody>
-          <a:bodyPr wrap="none" rtlCol="0">
-            <a:spAutoFit/>
-          </a:bodyPr>
-          <a:lstStyle/>
-          <a:p>
-            <a:r>
-              <a:rPr lang="pt-BR" sz="1351" dirty="0"/>
-              <a:t>Professor: Marcos Goulart Lima</a:t>
-            </a:r>
-          </a:p>
-        </p:txBody>
-      </p:sp>
-      <p:pic>
-        <p:nvPicPr>
-          <p:cNvPr id="8" name="Logo UFOP"/>
-          <p:cNvPicPr>
-            <a:picLocks noChangeAspect="1"/>
-          </p:cNvPicPr>
-          <p:nvPr/>
-        </p:nvPicPr>
-        <p:blipFill>
-          <a:blip r:embed="rId3"/>
-          <a:stretch>
-            <a:fillRect/>
-          </a:stretch>
-        </p:blipFill>
-        <p:spPr>
-          <a:xfrm>
-            <a:off x="62144" y="112237"/>
-            <a:ext cx="588096" cy="1228523"/>
-          </a:xfrm>
-          <a:prstGeom prst="rect">
-            <a:avLst/>
-          </a:prstGeom>
-        </p:spPr>
-      </p:pic>
-    </p:spTree>
-  </p:cSld>
-  <p:clrMapOvr>
-    <a:masterClrMapping/>
-  </p:clrMapOvr>
-</p:sld>
-</file>
-
-<file path=ppt/slides/slide15.xml><?xml version="1.0" encoding="utf-8"?>
-<p:sld xmlns:a="http://schemas.openxmlformats.org/drawingml/2006/main" xmlns:r="http://schemas.openxmlformats.org/officeDocument/2006/relationships" xmlns:p="http://schemas.openxmlformats.org/presentationml/2006/main">
-  <p:cSld>
-    <p:spTree>
-      <p:nvGrpSpPr>
-        <p:cNvPr id="1" name=""/>
-        <p:cNvGrpSpPr/>
-        <p:nvPr/>
-      </p:nvGrpSpPr>
-      <p:grpSpPr>
-        <a:xfrm>
-          <a:off x="0" y="0"/>
-          <a:ext cx="0" cy="0"/>
-          <a:chOff x="0" y="0"/>
-          <a:chExt cx="0" cy="0"/>
-        </a:xfrm>
-      </p:grpSpPr>
-      <p:sp>
-        <p:nvSpPr>
-          <p:cNvPr id="2" name="Título 1"/>
-          <p:cNvSpPr>
-            <a:spLocks noGrp="1"/>
-          </p:cNvSpPr>
-          <p:nvPr>
-            <p:ph type="title"/>
-          </p:nvPr>
-        </p:nvSpPr>
-        <p:spPr>
-          <a:xfrm>
-            <a:off x="1032611" y="0"/>
-            <a:ext cx="10827959" cy="900000"/>
-          </a:xfrm>
-        </p:spPr>
-        <p:txBody>
-          <a:bodyPr>
-            <a:normAutofit/>
-          </a:bodyPr>
-          <a:lstStyle/>
-          <a:p>
-            <a:pPr algn="ctr"/>
-            <a:r>
-              <a:rPr lang="pt-BR" dirty="0">
-                <a:latin typeface="AlternateGothic2 BT" panose="020B0608020202050204" pitchFamily="34" charset="0"/>
-              </a:rPr>
-              <a:t>CEA055 – Estatística e Probabilidade</a:t>
-            </a:r>
-            <a:br>
-              <a:rPr lang="pt-BR" dirty="0">
-                <a:latin typeface="AlternateGothic2 BT" panose="020B0608020202050204" pitchFamily="34" charset="0"/>
-              </a:rPr>
-            </a:br>
-            <a:r>
-              <a:rPr lang="pt-BR" sz="1800" b="1" dirty="0"/>
-              <a:t>T-Student e Qui-Quadrado</a:t>
-            </a:r>
-            <a:endParaRPr lang="pt-BR" dirty="0">
-              <a:latin typeface="AlternateGothic2 BT" panose="020B0608020202050204" pitchFamily="34" charset="0"/>
-            </a:endParaRPr>
-          </a:p>
-        </p:txBody>
-      </p:sp>
-      <p:sp>
-        <p:nvSpPr>
-          <p:cNvPr id="6" name="Caixa"/>
-          <p:cNvSpPr txBox="1"/>
-          <p:nvPr/>
-        </p:nvSpPr>
-        <p:spPr>
-          <a:xfrm>
-            <a:off x="685800" y="1150000"/>
-            <a:ext cx="10800000" cy="5100000"/>
-          </a:xfrm>
-          <a:prstGeom prst="rect">
-            <a:avLst/>
-          </a:prstGeom>
-          <a:noFill/>
-        </p:spPr>
-        <p:txBody>
-          <a:bodyPr wrap="square" rtlCol="0">
-            <a:normAutofit/>
-          </a:bodyPr>
-          <a:lstStyle/>
-          <a:p>
-            <a:pPr/>
-            <a:r>
-              <a:rPr lang="pt-BR" sz="2000" b="1" dirty="0"/>
-              <a:t>Resumo da aula</a:t>
-            </a:r>
-          </a:p>
-          <a:p>
-            <a:endParaRPr lang="pt-BR" sz="1800" dirty="0"/>
-          </a:p>
-          <a:p>
-            <a:pPr marL="342900" indent="-342900">
-              <a:buFont typeface="Arial" panose="020B0604020202020204" pitchFamily="34" charset="0"/>
-              <a:buChar char="•"/>
-            </a:pPr>
-            <a:r>
-              <a:rPr lang="pt-BR" sz="1800" dirty="0"/>
-              <a:t>Use a distribuição t-Student quando: a população é (aproximadamente) Normal, σ² é desconhecida, e o interesse é a média μ.</a:t>
-            </a:r>
-          </a:p>
-          <a:p>
-            <a:pPr marL="342900" indent="-342900">
-              <a:buFont typeface="Arial" panose="020B0604020202020204" pitchFamily="34" charset="0"/>
-              <a:buChar char="•"/>
-            </a:pPr>
-            <a:r>
-              <a:rPr lang="pt-BR" sz="1800" dirty="0"/>
-              <a:t>Use a distribuição qui-quadrado quando: a população é (aproximadamente) Normal e o interesse é a variância σ².</a:t>
-            </a:r>
-          </a:p>
-          <a:p>
-            <a:pPr marL="342900" indent="-342900">
-              <a:buFont typeface="Arial" panose="020B0604020202020204" pitchFamily="34" charset="0"/>
-              <a:buChar char="•"/>
-            </a:pPr>
-            <a:r>
-              <a:rPr lang="pt-BR" sz="1800" dirty="0"/>
-              <a:t>Ambas dependem apenas dos graus de liberdade ν = n − 1 e são consultadas por tabela, nunca calculadas diretamente em sala.</a:t>
-            </a:r>
-          </a:p>
-          <a:p>
-            <a:pPr marL="342900" indent="-342900">
-              <a:buFont typeface="Arial" panose="020B0604020202020204" pitchFamily="34" charset="0"/>
-              <a:buChar char="•"/>
-            </a:pPr>
-            <a:r>
-              <a:rPr lang="pt-BR" sz="1800" dirty="0"/>
-              <a:t>Quando ν é grande, a t se aproxima da Normal e a χ² fica mais simétrica.</a:t>
-            </a:r>
-          </a:p>
-          <a:p>
-            <a:endParaRPr lang="pt-BR" sz="1800" dirty="0"/>
-          </a:p>
-          <a:p>
-            <a:pPr/>
-            <a:r>
-              <a:rPr lang="pt-BR" sz="1700" i="1" dirty="0"/>
-              <a:t>Próximas aulas: vamos usar a t e a χ² para construir intervalos de confiança e testes de hipótese completos.</a:t>
-            </a:r>
-          </a:p>
-        </p:txBody>
-      </p:sp>
-      <p:sp>
-        <p:nvSpPr>
-          <p:cNvPr id="3" name="CaixaDeTexto 2"/>
-          <p:cNvSpPr txBox="1"/>
-          <p:nvPr/>
-        </p:nvSpPr>
-        <p:spPr>
-          <a:xfrm>
-            <a:off x="361395" y="6488668"/>
-            <a:ext cx="2395336" cy="300210"/>
-          </a:xfrm>
-          <a:prstGeom prst="rect">
-            <a:avLst/>
-          </a:prstGeom>
-          <a:noFill/>
-        </p:spPr>
-        <p:txBody>
-          <a:bodyPr wrap="none" rtlCol="0">
-            <a:spAutoFit/>
-          </a:bodyPr>
-          <a:lstStyle/>
-          <a:p>
-            <a:r>
-              <a:rPr lang="pt-BR" sz="1351" dirty="0"/>
-              <a:t>Professor: Marcos Goulart Lima</a:t>
-            </a:r>
-          </a:p>
-        </p:txBody>
-      </p:sp>
-      <p:pic>
-        <p:nvPicPr>
-          <p:cNvPr id="8" name="Logo UFOP"/>
-          <p:cNvPicPr>
-            <a:picLocks noChangeAspect="1"/>
-          </p:cNvPicPr>
-          <p:nvPr/>
-        </p:nvPicPr>
-        <p:blipFill>
-          <a:blip r:embed="rId3"/>
-          <a:stretch>
-            <a:fillRect/>
-          </a:stretch>
-        </p:blipFill>
-        <p:spPr>
-          <a:xfrm>
-            <a:off x="62144" y="112237"/>
-            <a:ext cx="588096" cy="1228523"/>
-          </a:xfrm>
-          <a:prstGeom prst="rect">
-            <a:avLst/>
-          </a:prstGeom>
-        </p:spPr>
-      </p:pic>
-    </p:spTree>
-  </p:cSld>
-  <p:clrMapOvr>
-    <a:masterClrMapping/>
-  </p:clrMapOvr>
-</p:sld>
-</file>
-
-<file path=ppt/slides/slide16.xml><?xml version="1.0" encoding="utf-8"?>
-<p:sld xmlns:a="http://schemas.openxmlformats.org/drawingml/2006/main" xmlns:r="http://schemas.openxmlformats.org/officeDocument/2006/relationships" xmlns:p="http://schemas.openxmlformats.org/presentationml/2006/main">
-  <p:cSld>
-    <p:spTree>
-      <p:nvGrpSpPr>
-        <p:cNvPr id="1" name=""/>
-        <p:cNvGrpSpPr/>
-        <p:nvPr/>
-      </p:nvGrpSpPr>
-      <p:grpSpPr>
-        <a:xfrm>
-          <a:off x="0" y="0"/>
-          <a:ext cx="0" cy="0"/>
-          <a:chOff x="0" y="0"/>
-          <a:chExt cx="0" cy="0"/>
-        </a:xfrm>
-      </p:grpSpPr>
-      <p:sp>
-        <p:nvSpPr>
-          <p:cNvPr id="2" name="Título 1"/>
-          <p:cNvSpPr>
-            <a:spLocks noGrp="1"/>
-          </p:cNvSpPr>
-          <p:nvPr>
-            <p:ph type="title"/>
-          </p:nvPr>
-        </p:nvSpPr>
-        <p:spPr>
-          <a:xfrm>
-            <a:off x="1032611" y="0"/>
-            <a:ext cx="10827959" cy="900000"/>
-          </a:xfrm>
-        </p:spPr>
-        <p:txBody>
-          <a:bodyPr>
-            <a:normAutofit/>
-          </a:bodyPr>
-          <a:lstStyle/>
-          <a:p>
-            <a:pPr algn="ctr"/>
-            <a:r>
-              <a:rPr lang="pt-BR" dirty="0">
-                <a:latin typeface="AlternateGothic2 BT" panose="020B0608020202050204" pitchFamily="34" charset="0"/>
-              </a:rPr>
-              <a:t>CEA055 – Estatística e Probabilidade</a:t>
-            </a:r>
-            <a:br>
-              <a:rPr lang="pt-BR" dirty="0">
-                <a:latin typeface="AlternateGothic2 BT" panose="020B0608020202050204" pitchFamily="34" charset="0"/>
-              </a:rPr>
-            </a:br>
-            <a:r>
-              <a:rPr lang="pt-BR" sz="1800" b="1" dirty="0"/>
-              <a:t>T-Student e Qui-Quadrado</a:t>
-            </a:r>
-            <a:endParaRPr lang="pt-BR" dirty="0">
-              <a:latin typeface="AlternateGothic2 BT" panose="020B0608020202050204" pitchFamily="34" charset="0"/>
-            </a:endParaRPr>
-          </a:p>
-        </p:txBody>
-      </p:sp>
-      <p:sp>
-        <p:nvSpPr>
-          <p:cNvPr id="6" name="Caixa"/>
-          <p:cNvSpPr txBox="1"/>
-          <p:nvPr/>
-        </p:nvSpPr>
-        <p:spPr>
-          <a:xfrm>
-            <a:off x="881687" y="1506234"/>
-            <a:ext cx="10618651" cy="5021055"/>
-          </a:xfrm>
-          <a:prstGeom prst="rect">
-            <a:avLst/>
-          </a:prstGeom>
-          <a:noFill/>
-        </p:spPr>
-        <p:txBody>
-          <a:bodyPr wrap="square" rtlCol="0">
-            <a:normAutofit/>
-          </a:bodyPr>
-          <a:lstStyle/>
-          <a:p>
-            <a:pPr/>
-            <a:r>
-              <a:rPr lang="pt-BR" sz="2400" b="1" dirty="0"/>
-              <a:t>Atividades referentes à aula</a:t>
-            </a:r>
-          </a:p>
-          <a:p>
-            <a:endParaRPr lang="pt-BR" sz="2400" dirty="0"/>
-          </a:p>
-          <a:p>
-            <a:pPr/>
-            <a:r>
-              <a:rPr lang="pt-BR" sz="2000" b="1" dirty="0"/>
-              <a:t>Leitura recomendada:</a:t>
-            </a:r>
-          </a:p>
-          <a:p>
-            <a:pPr marL="342900" indent="-342900">
-              <a:buFont typeface="Arial" panose="020B0604020202020204" pitchFamily="34" charset="0"/>
-              <a:buChar char="•"/>
-            </a:pPr>
-            <a:r>
-              <a:rPr lang="pt-BR" sz="1800" dirty="0"/>
-              <a:t>Bussab &amp; Morettin — Cap. 7: 7.7.2 e 7.7.3 (distribuições t e qui-quadrado)</a:t>
-            </a:r>
-          </a:p>
-          <a:p>
-            <a:pPr marL="342900" indent="-342900">
-              <a:buFont typeface="Arial" panose="020B0604020202020204" pitchFamily="34" charset="0"/>
-              <a:buChar char="•"/>
-            </a:pPr>
-            <a:r>
-              <a:rPr lang="pt-BR" sz="1800" dirty="0"/>
-              <a:t>Montgomery &amp; Runger — Cap. 8: 8.2.1</a:t>
-            </a:r>
-          </a:p>
-          <a:p>
-            <a:pPr marL="342900" indent="-342900">
-              <a:buFont typeface="Arial" panose="020B0604020202020204" pitchFamily="34" charset="0"/>
-              <a:buChar char="•"/>
-            </a:pPr>
-            <a:r>
-              <a:rPr lang="pt-BR" sz="1800" dirty="0"/>
-              <a:t>Magalhães &amp; Lima — Cap. 7: 7.4; Cap. 8: 8.5</a:t>
-            </a:r>
-          </a:p>
-          <a:p>
-            <a:pPr marL="342900" indent="-342900">
-              <a:buFont typeface="Arial" panose="020B0604020202020204" pitchFamily="34" charset="0"/>
-              <a:buChar char="•"/>
-            </a:pPr>
-            <a:r>
-              <a:rPr lang="pt-BR" sz="1800" dirty="0"/>
-              <a:t>Morettin (Prob. e Inf.) — Cap. 14: 14.1; Cap. 16: 16.1</a:t>
-            </a:r>
-          </a:p>
-          <a:p>
-            <a:endParaRPr lang="pt-BR" sz="1800" dirty="0"/>
-          </a:p>
-          <a:p>
-            <a:pPr/>
-            <a:r>
-              <a:rPr lang="pt-BR" sz="2000" b="1" dirty="0"/>
-              <a:t>Exercícios recomendados:</a:t>
-            </a:r>
-          </a:p>
-          <a:p>
-            <a:pPr marL="342900" indent="-342900">
-              <a:buFont typeface="Arial" panose="020B0604020202020204" pitchFamily="34" charset="0"/>
-              <a:buChar char="•"/>
-            </a:pPr>
-            <a:r>
-              <a:rPr lang="pt-BR" sz="1800" dirty="0"/>
-              <a:t>Pratique a leitura da tabela t e da tabela qui-quadrado para diferentes graus de liberdade e níveis de significância (α = 0,10; 0,05; 0,01).</a:t>
-            </a:r>
-          </a:p>
-          <a:p>
-            <a:pPr marL="342900" indent="-342900">
-              <a:buFont typeface="Arial" panose="020B0604020202020204" pitchFamily="34" charset="0"/>
-              <a:buChar char="•"/>
-            </a:pPr>
-            <a:r>
-              <a:rPr lang="pt-BR" sz="1800" dirty="0"/>
-              <a:t>Refaça o exemplo do processo de fabricação com S² = 0,0030 mm² e compare a conclusão.</a:t>
-            </a:r>
-          </a:p>
-        </p:txBody>
-      </p:sp>
-      <p:sp>
-        <p:nvSpPr>
-          <p:cNvPr id="3" name="CaixaDeTexto 2"/>
-          <p:cNvSpPr txBox="1"/>
-          <p:nvPr/>
-        </p:nvSpPr>
-        <p:spPr>
-          <a:xfrm>
-            <a:off x="361395" y="6488668"/>
-            <a:ext cx="2395336" cy="300210"/>
-          </a:xfrm>
-          <a:prstGeom prst="rect">
-            <a:avLst/>
-          </a:prstGeom>
-          <a:noFill/>
-        </p:spPr>
-        <p:txBody>
-          <a:bodyPr wrap="none" rtlCol="0">
-            <a:spAutoFit/>
-          </a:bodyPr>
-          <a:lstStyle/>
-          <a:p>
-            <a:r>
-              <a:rPr lang="pt-BR" sz="1351" dirty="0"/>
-              <a:t>Professor: Marcos Goulart Lima</a:t>
-            </a:r>
-          </a:p>
-        </p:txBody>
-      </p:sp>
-      <p:pic>
-        <p:nvPicPr>
-          <p:cNvPr id="8" name="Logo UFOP"/>
-          <p:cNvPicPr>
-            <a:picLocks noChangeAspect="1"/>
-          </p:cNvPicPr>
-          <p:nvPr/>
-        </p:nvPicPr>
-        <p:blipFill>
-          <a:blip r:embed="rId3"/>
-          <a:stretch>
-            <a:fillRect/>
-          </a:stretch>
-        </p:blipFill>
-        <p:spPr>
-          <a:xfrm>
-            <a:off x="62144" y="112237"/>
-            <a:ext cx="588096" cy="1228523"/>
-          </a:xfrm>
-          <a:prstGeom prst="rect">
-            <a:avLst/>
-          </a:prstGeom>
-        </p:spPr>
-      </p:pic>
-    </p:spTree>
-  </p:cSld>
-  <p:clrMapOvr>
-    <a:masterClrMapping/>
-  </p:clrMapOvr>
-</p:sld>
-</file>
-
-<file path=ppt/slides/slide2.xml><?xml version="1.0" encoding="utf-8"?>
-<p:sld xmlns:a="http://schemas.openxmlformats.org/drawingml/2006/main" xmlns:r="http://schemas.openxmlformats.org/officeDocument/2006/relationships" xmlns:p="http://schemas.openxmlformats.org/presentationml/2006/main">
-  <p:cSld>
-    <p:spTree>
-      <p:nvGrpSpPr>
-        <p:cNvPr id="1" name=""/>
-        <p:cNvGrpSpPr/>
-        <p:nvPr/>
-      </p:nvGrpSpPr>
-      <p:grpSpPr>
-        <a:xfrm>
-          <a:off x="0" y="0"/>
-          <a:ext cx="0" cy="0"/>
-          <a:chOff x="0" y="0"/>
-          <a:chExt cx="0" cy="0"/>
-        </a:xfrm>
-      </p:grpSpPr>
-      <p:sp>
-        <p:nvSpPr>
-          <p:cNvPr id="2" name="Título 1">
-            <a:extLst>
-              <a:ext uri="{FF2B5EF4-FFF2-40B4-BE49-F238E27FC236}">
-                <a16:creationId xmlns:a16="http://schemas.microsoft.com/office/drawing/2014/main" id="{BC798918-7CB4-450A-A042-F0B538CA25DE}"/>
-              </a:ext>
-            </a:extLst>
-          </p:cNvPr>
-          <p:cNvSpPr>
-            <a:spLocks noGrp="1"/>
-          </p:cNvSpPr>
-          <p:nvPr>
-            <p:ph type="title"/>
-          </p:nvPr>
-        </p:nvSpPr>
-        <p:spPr>
-          <a:xfrm>
-            <a:off x="1032611" y="0"/>
-            <a:ext cx="10827959" cy="1574800"/>
-          </a:xfrm>
-        </p:spPr>
-        <p:txBody>
-          <a:bodyPr>
-            <a:normAutofit/>
-          </a:bodyPr>
-          <a:lstStyle/>
-          <a:p>
-            <a:pPr algn="ctr"/>
-            <a:r>
-              <a:rPr lang="pt-BR" dirty="0">
-                <a:latin typeface="AlternateGothic2 BT" panose="020B0608020202050204" pitchFamily="34" charset="0"/>
-              </a:rPr>
-              <a:t>CEA055 – Estatística e Probabilidade</a:t>
-            </a:r>
-            <a:br>
-              <a:rPr lang="pt-BR" dirty="0">
-                <a:latin typeface="AlternateGothic2 BT" panose="020B0608020202050204" pitchFamily="34" charset="0"/>
-              </a:rPr>
-            </a:br>
-            <a:r>
-              <a:rPr lang="pt-BR" sz="2200" b="1" dirty="0"/>
-              <a:t>T-Student e Qui-Quadrado</a:t>
-            </a:r>
-            <a:endParaRPr lang="pt-BR" dirty="0">
-              <a:latin typeface="AlternateGothic2 BT" panose="020B0608020202050204" pitchFamily="34" charset="0"/>
-            </a:endParaRPr>
-          </a:p>
-        </p:txBody>
-      </p:sp>
       <mc:AlternateContent xmlns:mc="http://schemas.openxmlformats.org/markup-compatibility/2006" xmlns:a14="http://schemas.microsoft.com/office/drawing/2010/main">
         <mc:Choice Requires="a14">
           <p:sp>
@@ -6583,7 +6240,7 @@
         <p:spPr>
           <a:xfrm>
             <a:off x="361395" y="6488668"/>
-            <a:ext cx="2395336" cy="300210"/>
+            <a:ext cx="7620000" cy="300210"/>
           </a:xfrm>
           <a:prstGeom prst="rect">
             <a:avLst/>
@@ -6598,47 +6255,11 @@
           <a:p>
             <a:r>
               <a:rPr lang="pt-BR" sz="1351" dirty="0"/>
-              <a:t>Professor: Marcos Goulart Lima</a:t>
-            </a:r>
-          </a:p>
-        </p:txBody>
-      </p:sp>
-      <p:pic>
-        <p:nvPicPr>
-          <p:cNvPr id="8" name="Espaço Reservado para Conteúdo 4">
-            <a:extLst>
-              <a:ext uri="{FF2B5EF4-FFF2-40B4-BE49-F238E27FC236}">
-                <a16:creationId xmlns:a16="http://schemas.microsoft.com/office/drawing/2014/main" id="{65AB402D-D1A8-4F31-BA42-34A6F0FC69F9}"/>
-              </a:ext>
-            </a:extLst>
-          </p:cNvPr>
-          <p:cNvPicPr>
-            <a:picLocks noChangeAspect="1"/>
-          </p:cNvPicPr>
-          <p:nvPr/>
-        </p:nvPicPr>
-        <p:blipFill>
-          <a:blip r:embed="rId3">
-            <a:extLst>
-              <a:ext uri="{28A0092B-C50C-407E-A947-70E740481C1C}">
-                <a14:useLocalDpi xmlns:a14="http://schemas.microsoft.com/office/drawing/2010/main" val="0"/>
-              </a:ext>
-            </a:extLst>
-          </a:blip>
-          <a:stretch>
-            <a:fillRect/>
-          </a:stretch>
-        </p:blipFill>
-        <p:spPr>
-          <a:xfrm>
-            <a:off x="62144" y="112237"/>
-            <a:ext cx="588096" cy="1228523"/>
-          </a:xfrm>
-          <a:prstGeom prst="rect">
-            <a:avLst/>
-          </a:prstGeom>
-        </p:spPr>
-      </p:pic>
+              <a:t>CEA055 - Estatística e Probabilidade - Professor: Marcos Goulart Lima</a:t>
+            </a:r>
+          </a:p>
+        </p:txBody>
+      </p:sp>
     </p:spTree>
     <p:extLst>
       <p:ext uri="{BB962C8B-B14F-4D97-AF65-F5344CB8AC3E}">
@@ -6652,7 +6273,7 @@
 </p:sld>
 </file>
 
-<file path=ppt/slides/slide3.xml><?xml version="1.0" encoding="utf-8"?>
+<file path=ppt/slides/slide4.xml><?xml version="1.0" encoding="utf-8"?>
 <p:sld xmlns:a="http://schemas.openxmlformats.org/drawingml/2006/main" xmlns:r="http://schemas.openxmlformats.org/officeDocument/2006/relationships" xmlns:p="http://schemas.openxmlformats.org/presentationml/2006/main">
   <p:cSld>
     <p:spTree>
@@ -6671,56 +6292,6 @@
       </p:grpSpPr>
       <p:sp>
         <p:nvSpPr>
-          <p:cNvPr id="2" name="Título 1">
-            <a:extLst>
-              <a:ext uri="{FF2B5EF4-FFF2-40B4-BE49-F238E27FC236}">
-                <a16:creationId xmlns:a16="http://schemas.microsoft.com/office/drawing/2014/main" id="{BC798918-7CB4-450A-A042-F0B538CA25DE}"/>
-              </a:ext>
-            </a:extLst>
-          </p:cNvPr>
-          <p:cNvSpPr>
-            <a:spLocks noGrp="1"/>
-          </p:cNvSpPr>
-          <p:nvPr>
-            <p:ph type="title"/>
-          </p:nvPr>
-        </p:nvSpPr>
-        <p:spPr>
-          <a:xfrm>
-            <a:off x="1032611" y="0"/>
-            <a:ext cx="10827959" cy="1574800"/>
-          </a:xfrm>
-        </p:spPr>
-        <p:txBody>
-          <a:bodyPr>
-            <a:normAutofit/>
-          </a:bodyPr>
-          <a:lstStyle/>
-          <a:p>
-            <a:pPr algn="ctr"/>
-            <a:r>
-              <a:rPr lang="pt-BR" dirty="0">
-                <a:latin typeface="AlternateGothic2 BT" panose="020B0608020202050204" pitchFamily="34" charset="0"/>
-              </a:rPr>
-              <a:t>CEA055 – Estatística e Probabilidade</a:t>
-            </a:r>
-            <a:br>
-              <a:rPr lang="pt-BR" dirty="0">
-                <a:latin typeface="AlternateGothic2 BT" panose="020B0608020202050204" pitchFamily="34" charset="0"/>
-              </a:rPr>
-            </a:br>
-            <a:r>
-              <a:rPr lang="pt-BR" sz="2200" b="1" dirty="0"/>
-              <a:t>T-Student e Qui-Quadrado</a:t>
-            </a:r>
-            <a:endParaRPr lang="pt-BR" dirty="0">
-              <a:latin typeface="AlternateGothic2 BT" panose="020B0608020202050204" pitchFamily="34" charset="0"/>
-            </a:endParaRPr>
-          </a:p>
-        </p:txBody>
-      </p:sp>
-      <p:sp>
-        <p:nvSpPr>
           <p:cNvPr id="3" name="CaixaDeTexto 2">
             <a:extLst>
               <a:ext uri="{FF2B5EF4-FFF2-40B4-BE49-F238E27FC236}">
@@ -6734,7 +6305,7 @@
         <p:spPr>
           <a:xfrm>
             <a:off x="361395" y="6488668"/>
-            <a:ext cx="2395336" cy="300210"/>
+            <a:ext cx="7620000" cy="300210"/>
           </a:xfrm>
           <a:prstGeom prst="rect">
             <a:avLst/>
@@ -6749,47 +6320,11 @@
           <a:p>
             <a:r>
               <a:rPr lang="pt-BR" sz="1351" dirty="0"/>
-              <a:t>Professor: Marcos Goulart Lima</a:t>
-            </a:r>
-          </a:p>
-        </p:txBody>
-      </p:sp>
-      <p:pic>
-        <p:nvPicPr>
-          <p:cNvPr id="8" name="Espaço Reservado para Conteúdo 4">
-            <a:extLst>
-              <a:ext uri="{FF2B5EF4-FFF2-40B4-BE49-F238E27FC236}">
-                <a16:creationId xmlns:a16="http://schemas.microsoft.com/office/drawing/2014/main" id="{65AB402D-D1A8-4F31-BA42-34A6F0FC69F9}"/>
-              </a:ext>
-            </a:extLst>
-          </p:cNvPr>
-          <p:cNvPicPr>
-            <a:picLocks noChangeAspect="1"/>
-          </p:cNvPicPr>
-          <p:nvPr/>
-        </p:nvPicPr>
-        <p:blipFill>
-          <a:blip r:embed="rId2">
-            <a:extLst>
-              <a:ext uri="{28A0092B-C50C-407E-A947-70E740481C1C}">
-                <a14:useLocalDpi xmlns:a14="http://schemas.microsoft.com/office/drawing/2010/main" val="0"/>
-              </a:ext>
-            </a:extLst>
-          </a:blip>
-          <a:stretch>
-            <a:fillRect/>
-          </a:stretch>
-        </p:blipFill>
-        <p:spPr>
-          <a:xfrm>
-            <a:off x="62144" y="112237"/>
-            <a:ext cx="588096" cy="1228523"/>
-          </a:xfrm>
-          <a:prstGeom prst="rect">
-            <a:avLst/>
-          </a:prstGeom>
-        </p:spPr>
-      </p:pic>
+              <a:t>CEA055 - Estatística e Probabilidade - Professor: Marcos Goulart Lima</a:t>
+            </a:r>
+          </a:p>
+        </p:txBody>
+      </p:sp>
       <p:pic>
         <p:nvPicPr>
           <p:cNvPr id="5" name="Imagem 4">
@@ -6833,275 +6368,6 @@
 </p:sld>
 </file>
 
-<file path=ppt/slides/slide4.xml><?xml version="1.0" encoding="utf-8"?>
-<p:sld xmlns:a="http://schemas.openxmlformats.org/drawingml/2006/main" xmlns:r="http://schemas.openxmlformats.org/officeDocument/2006/relationships" xmlns:p="http://schemas.openxmlformats.org/presentationml/2006/main">
-  <p:cSld>
-    <p:spTree>
-      <p:nvGrpSpPr>
-        <p:cNvPr id="1" name=""/>
-        <p:cNvGrpSpPr/>
-        <p:nvPr/>
-      </p:nvGrpSpPr>
-      <p:grpSpPr>
-        <a:xfrm>
-          <a:off x="0" y="0"/>
-          <a:ext cx="0" cy="0"/>
-          <a:chOff x="0" y="0"/>
-          <a:chExt cx="0" cy="0"/>
-        </a:xfrm>
-      </p:grpSpPr>
-      <p:sp>
-        <p:nvSpPr>
-          <p:cNvPr id="2" name="Título 1"/>
-          <p:cNvSpPr>
-            <a:spLocks noGrp="1"/>
-          </p:cNvSpPr>
-          <p:nvPr>
-            <p:ph type="title"/>
-          </p:nvPr>
-        </p:nvSpPr>
-        <p:spPr>
-          <a:xfrm>
-            <a:off x="1032611" y="0"/>
-            <a:ext cx="10827959" cy="1574800"/>
-          </a:xfrm>
-        </p:spPr>
-        <p:txBody>
-          <a:bodyPr>
-            <a:normAutofit/>
-          </a:bodyPr>
-          <a:lstStyle/>
-          <a:p>
-            <a:pPr algn="ctr"/>
-            <a:r>
-              <a:rPr lang="pt-BR" dirty="0">
-                <a:latin typeface="AlternateGothic2 BT" panose="020B0608020202050204" pitchFamily="34" charset="0"/>
-              </a:rPr>
-              <a:t>CEA055 – Estatística e Probabilidade</a:t>
-            </a:r>
-            <a:br>
-              <a:rPr lang="pt-BR" dirty="0">
-                <a:latin typeface="AlternateGothic2 BT" panose="020B0608020202050204" pitchFamily="34" charset="0"/>
-              </a:rPr>
-            </a:br>
-            <a:r>
-              <a:rPr lang="pt-BR" sz="2200" b="1" dirty="0"/>
-              <a:t>Distribuições t-Student e Qui-Quadrado</a:t>
-            </a:r>
-            <a:endParaRPr lang="pt-BR" dirty="0">
-              <a:latin typeface="AlternateGothic2 BT" panose="020B0608020202050204" pitchFamily="34" charset="0"/>
-            </a:endParaRPr>
-          </a:p>
-        </p:txBody>
-      </p:sp>
-      <p:sp>
-        <p:nvSpPr>
-          <p:cNvPr id="6" name="CaixaDeTexto 5"/>
-          <p:cNvSpPr txBox="1"/>
-          <p:nvPr/>
-        </p:nvSpPr>
-        <p:spPr>
-          <a:xfrm>
-            <a:off x="1032608" y="1750000"/>
-            <a:ext cx="10067277" cy="4200000"/>
-          </a:xfrm>
-          <a:prstGeom prst="rect">
-            <a:avLst/>
-          </a:prstGeom>
-          <a:noFill/>
-        </p:spPr>
-        <p:txBody>
-          <a:bodyPr wrap="square" rtlCol="0">
-            <a:spAutoFit/>
-          </a:bodyPr>
-          <a:lstStyle/>
-          <a:p>
-            <a:r>
-              <a:rPr lang="pt-BR" sz="2000" b="1" dirty="0"/>
-              <a:t>Objetivos da aula:</a:t>
-            </a:r>
-          </a:p>
-          <a:p>
-            <a:pPr marL="285737" indent="-285737">
-              <a:buFont typeface="Arial" panose="020B0604020202020204" pitchFamily="34" charset="0"/>
-              <a:buChar char="•"/>
-            </a:pPr>
-            <a:r>
-              <a:rPr lang="pt-BR" sz="2000" dirty="0"/>
-              <a:t>Reconhecer quando a distribuição t-Student substitui a normal padrão em problemas de inferência.</a:t>
-            </a:r>
-          </a:p>
-          <a:p>
-            <a:pPr marL="285737" indent="-285737">
-              <a:buFont typeface="Arial" panose="020B0604020202020204" pitchFamily="34" charset="0"/>
-              <a:buChar char="•"/>
-            </a:pPr>
-            <a:r>
-              <a:rPr lang="pt-BR" sz="2000" dirty="0"/>
-              <a:t>Utilizar a tabela t para obter valores críticos e probabilidades.</a:t>
-            </a:r>
-          </a:p>
-          <a:p>
-            <a:pPr marL="285737" indent="-285737">
-              <a:buFont typeface="Arial" panose="020B0604020202020204" pitchFamily="34" charset="0"/>
-              <a:buChar char="•"/>
-            </a:pPr>
-            <a:r>
-              <a:rPr lang="pt-BR" sz="2000" dirty="0"/>
-              <a:t>Conhecer a distribuição qui-quadrado, suas propriedades e sua tabela de valores críticos.</a:t>
-            </a:r>
-          </a:p>
-          <a:p>
-            <a:pPr marL="285737" indent="-285737">
-              <a:buFont typeface="Arial" panose="020B0604020202020204" pitchFamily="34" charset="0"/>
-              <a:buChar char="•"/>
-            </a:pPr>
-            <a:r>
-              <a:rPr lang="pt-BR" sz="2000" dirty="0"/>
-              <a:t>Relacionar as distribuições t, qui-quadrado e normal como base para os próximos testes de inferência.</a:t>
-            </a:r>
-          </a:p>
-          <a:p>
-            <a:r>
-              <a:rPr lang="pt-BR" sz="2000" b="1" dirty="0"/>
-              <a:t xml:space="preserve">Referências: </a:t>
-            </a:r>
-          </a:p>
-          <a:p>
-            <a:pPr marL="457178" indent="-457178">
-              <a:buFont typeface="Arial" panose="020B0604020202020204" pitchFamily="34" charset="0"/>
-              <a:buChar char="•"/>
-            </a:pPr>
-            <a:r>
-              <a:rPr lang="pt-BR" sz="1800" dirty="0"/>
-              <a:t xml:space="preserve">Bussab, Morettin. </a:t>
-            </a:r>
-            <a:r>
-              <a:rPr lang="pt-BR" sz="1800" b="1" dirty="0"/>
-              <a:t>Estatística Básica</a:t>
-            </a:r>
-            <a:r>
-              <a:rPr lang="pt-BR" sz="1800" dirty="0"/>
-              <a:t>, 9ed — Cap. 7 (7.7.2, 7.7.3)</a:t>
-            </a:r>
-          </a:p>
-          <a:p>
-            <a:pPr marL="457178" indent="-457178">
-              <a:buFont typeface="Arial" panose="020B0604020202020204" pitchFamily="34" charset="0"/>
-              <a:buChar char="•"/>
-            </a:pPr>
-            <a:r>
-              <a:rPr lang="pt-BR" sz="1800" dirty="0"/>
-              <a:t xml:space="preserve">Montgomery, Runger. </a:t>
-            </a:r>
-            <a:r>
-              <a:rPr lang="pt-BR" sz="1800" b="1" dirty="0"/>
-              <a:t>Applied Statistics and Probability for Engineers</a:t>
-            </a:r>
-            <a:r>
-              <a:rPr lang="pt-BR" sz="1800" dirty="0"/>
-              <a:t>, 7th ed — Cap. 8 (8.2.1)</a:t>
-            </a:r>
-          </a:p>
-          <a:p>
-            <a:pPr marL="457178" indent="-457178">
-              <a:buFont typeface="Arial" panose="020B0604020202020204" pitchFamily="34" charset="0"/>
-              <a:buChar char="•"/>
-            </a:pPr>
-            <a:r>
-              <a:rPr lang="pt-BR" sz="1800" dirty="0"/>
-              <a:t xml:space="preserve">Magalhães, Lima. </a:t>
-            </a:r>
-            <a:r>
-              <a:rPr lang="pt-BR" sz="1800" b="1" dirty="0"/>
-              <a:t>Noções de Probabilidade e Estatística</a:t>
-            </a:r>
-            <a:r>
-              <a:rPr lang="pt-BR" sz="1800" dirty="0"/>
-              <a:t>, 5ed — Cap. 7 (7.4); Cap. 8 (8.5)</a:t>
-            </a:r>
-          </a:p>
-          <a:p>
-            <a:pPr marL="457178" indent="-457178">
-              <a:buFont typeface="Arial" panose="020B0604020202020204" pitchFamily="34" charset="0"/>
-              <a:buChar char="•"/>
-            </a:pPr>
-            <a:r>
-              <a:rPr lang="pt-BR" sz="1800" dirty="0"/>
-              <a:t xml:space="preserve">Morettin. </a:t>
-            </a:r>
-            <a:r>
-              <a:rPr lang="pt-BR" sz="1800" b="1" dirty="0"/>
-              <a:t>Estatística Básica: Probabilidade e Inferência</a:t>
-            </a:r>
-            <a:r>
-              <a:rPr lang="pt-BR" sz="1800" dirty="0"/>
-              <a:t>, — Cap. 14 (14.1); Cap. 16 (16.1)</a:t>
-            </a:r>
-          </a:p>
-        </p:txBody>
-      </p:sp>
-      <p:sp>
-        <p:nvSpPr>
-          <p:cNvPr id="3" name="CaixaDeTexto 2"/>
-          <p:cNvSpPr txBox="1"/>
-          <p:nvPr/>
-        </p:nvSpPr>
-        <p:spPr>
-          <a:xfrm>
-            <a:off x="361395" y="6488668"/>
-            <a:ext cx="2395336" cy="300210"/>
-          </a:xfrm>
-          <a:prstGeom prst="rect">
-            <a:avLst/>
-          </a:prstGeom>
-          <a:noFill/>
-        </p:spPr>
-        <p:txBody>
-          <a:bodyPr wrap="none" rtlCol="0">
-            <a:spAutoFit/>
-          </a:bodyPr>
-          <a:lstStyle/>
-          <a:p>
-            <a:r>
-              <a:rPr lang="pt-BR" sz="1351" dirty="0"/>
-              <a:t>Professor: Marcos Goulart Lima</a:t>
-            </a:r>
-          </a:p>
-        </p:txBody>
-      </p:sp>
-      <p:pic>
-        <p:nvPicPr>
-          <p:cNvPr id="8" name="Logo UFOP"/>
-          <p:cNvPicPr>
-            <a:picLocks noChangeAspect="1"/>
-          </p:cNvPicPr>
-          <p:nvPr/>
-        </p:nvPicPr>
-        <p:blipFill>
-          <a:blip r:embed="rId3"/>
-          <a:stretch>
-            <a:fillRect/>
-          </a:stretch>
-        </p:blipFill>
-        <p:spPr>
-          <a:xfrm>
-            <a:off x="62144" y="112237"/>
-            <a:ext cx="588096" cy="1228523"/>
-          </a:xfrm>
-          <a:prstGeom prst="rect">
-            <a:avLst/>
-          </a:prstGeom>
-        </p:spPr>
-      </p:pic>
-    </p:spTree>
-  </p:cSld>
-  <p:clrMapOvr>
-    <a:masterClrMapping/>
-  </p:clrMapOvr>
-</p:sld>
-</file>
-
 <file path=ppt/slides/slide5.xml><?xml version="1.0" encoding="utf-8"?>
 <p:sld xmlns:a="http://schemas.openxmlformats.org/drawingml/2006/main" xmlns:r="http://schemas.openxmlformats.org/officeDocument/2006/relationships" xmlns:p="http://schemas.openxmlformats.org/presentationml/2006/main">
   <p:cSld>
@@ -7119,50 +6385,6 @@
           <a:chExt cx="0" cy="0"/>
         </a:xfrm>
       </p:grpSpPr>
-      <p:sp>
-        <p:nvSpPr>
-          <p:cNvPr id="2" name="Título 1"/>
-          <p:cNvSpPr>
-            <a:spLocks noGrp="1"/>
-          </p:cNvSpPr>
-          <p:nvPr>
-            <p:ph type="title"/>
-          </p:nvPr>
-        </p:nvSpPr>
-        <p:spPr>
-          <a:xfrm>
-            <a:off x="1032611" y="0"/>
-            <a:ext cx="10827959" cy="900000"/>
-          </a:xfrm>
-        </p:spPr>
-        <p:txBody>
-          <a:bodyPr>
-            <a:normAutofit/>
-          </a:bodyPr>
-          <a:lstStyle/>
-          <a:p>
-            <a:pPr algn="ctr"/>
-            <a:r>
-              <a:rPr lang="pt-BR" dirty="0">
-                <a:latin typeface="AlternateGothic2 BT" panose="020B0608020202050204" pitchFamily="34" charset="0"/>
-              </a:rPr>
-              <a:t>CEA055 – Estatística e Probabilidade</a:t>
-            </a:r>
-            <a:br>
-              <a:rPr lang="pt-BR" dirty="0">
-                <a:latin typeface="AlternateGothic2 BT" panose="020B0608020202050204" pitchFamily="34" charset="0"/>
-              </a:rPr>
-            </a:br>
-            <a:r>
-              <a:rPr lang="pt-BR" sz="1800" b="1" dirty="0"/>
-              <a:t>T-Student e Qui-Quadrado</a:t>
-            </a:r>
-            <a:endParaRPr lang="pt-BR" dirty="0">
-              <a:latin typeface="AlternateGothic2 BT" panose="020B0608020202050204" pitchFamily="34" charset="0"/>
-            </a:endParaRPr>
-          </a:p>
-        </p:txBody>
-      </p:sp>
       <p:sp>
         <p:nvSpPr>
           <p:cNvPr id="6" name="Caixa"/>
@@ -7256,7 +6478,7 @@
         <p:spPr>
           <a:xfrm>
             <a:off x="361395" y="6488668"/>
-            <a:ext cx="2395336" cy="300210"/>
+            <a:ext cx="7620000" cy="300210"/>
           </a:xfrm>
           <a:prstGeom prst="rect">
             <a:avLst/>
@@ -7271,35 +6493,11 @@
           <a:p>
             <a:r>
               <a:rPr lang="pt-BR" sz="1351" dirty="0"/>
-              <a:t>Professor: Marcos Goulart Lima</a:t>
-            </a:r>
-          </a:p>
-        </p:txBody>
-      </p:sp>
-      <p:pic>
-        <p:nvPicPr>
-          <p:cNvPr id="8" name="Logo UFOP"/>
-          <p:cNvPicPr>
-            <a:picLocks noChangeAspect="1"/>
-          </p:cNvPicPr>
-          <p:nvPr/>
-        </p:nvPicPr>
-        <p:blipFill>
-          <a:blip r:embed="rId3"/>
-          <a:stretch>
-            <a:fillRect/>
-          </a:stretch>
-        </p:blipFill>
-        <p:spPr>
-          <a:xfrm>
-            <a:off x="62144" y="112237"/>
-            <a:ext cx="588096" cy="1228523"/>
-          </a:xfrm>
-          <a:prstGeom prst="rect">
-            <a:avLst/>
-          </a:prstGeom>
-        </p:spPr>
-      </p:pic>
+              <a:t>CEA055 - Estatística e Probabilidade - Professor: Marcos Goulart Lima</a:t>
+            </a:r>
+          </a:p>
+        </p:txBody>
+      </p:sp>
     </p:spTree>
   </p:cSld>
   <p:clrMapOvr>
@@ -7327,50 +6525,6 @@
       </p:grpSpPr>
       <p:sp>
         <p:nvSpPr>
-          <p:cNvPr id="2" name="Título 1"/>
-          <p:cNvSpPr>
-            <a:spLocks noGrp="1"/>
-          </p:cNvSpPr>
-          <p:nvPr>
-            <p:ph type="title"/>
-          </p:nvPr>
-        </p:nvSpPr>
-        <p:spPr>
-          <a:xfrm>
-            <a:off x="1032611" y="0"/>
-            <a:ext cx="10827959" cy="900000"/>
-          </a:xfrm>
-        </p:spPr>
-        <p:txBody>
-          <a:bodyPr>
-            <a:normAutofit/>
-          </a:bodyPr>
-          <a:lstStyle/>
-          <a:p>
-            <a:pPr algn="ctr"/>
-            <a:r>
-              <a:rPr lang="pt-BR" dirty="0">
-                <a:latin typeface="AlternateGothic2 BT" panose="020B0608020202050204" pitchFamily="34" charset="0"/>
-              </a:rPr>
-              <a:t>CEA055 – Estatística e Probabilidade</a:t>
-            </a:r>
-            <a:br>
-              <a:rPr lang="pt-BR" dirty="0">
-                <a:latin typeface="AlternateGothic2 BT" panose="020B0608020202050204" pitchFamily="34" charset="0"/>
-              </a:rPr>
-            </a:br>
-            <a:r>
-              <a:rPr lang="pt-BR" sz="1800" b="1" dirty="0"/>
-              <a:t>T-Student e Qui-Quadrado</a:t>
-            </a:r>
-            <a:endParaRPr lang="pt-BR" dirty="0">
-              <a:latin typeface="AlternateGothic2 BT" panose="020B0608020202050204" pitchFamily="34" charset="0"/>
-            </a:endParaRPr>
-          </a:p>
-        </p:txBody>
-      </p:sp>
-      <p:sp>
-        <p:nvSpPr>
           <p:cNvPr id="6" name="Caixa"/>
           <p:cNvSpPr txBox="1"/>
           <p:nvPr/>
@@ -7461,7 +6615,7 @@
         <p:spPr>
           <a:xfrm>
             <a:off x="361395" y="6488668"/>
-            <a:ext cx="2395336" cy="300210"/>
+            <a:ext cx="7620000" cy="300210"/>
           </a:xfrm>
           <a:prstGeom prst="rect">
             <a:avLst/>
@@ -7476,35 +6630,11 @@
           <a:p>
             <a:r>
               <a:rPr lang="pt-BR" sz="1351" dirty="0"/>
-              <a:t>Professor: Marcos Goulart Lima</a:t>
-            </a:r>
-          </a:p>
-        </p:txBody>
-      </p:sp>
-      <p:pic>
-        <p:nvPicPr>
-          <p:cNvPr id="8" name="Logo UFOP"/>
-          <p:cNvPicPr>
-            <a:picLocks noChangeAspect="1"/>
-          </p:cNvPicPr>
-          <p:nvPr/>
-        </p:nvPicPr>
-        <p:blipFill>
-          <a:blip r:embed="rId3"/>
-          <a:stretch>
-            <a:fillRect/>
-          </a:stretch>
-        </p:blipFill>
-        <p:spPr>
-          <a:xfrm>
-            <a:off x="62144" y="112237"/>
-            <a:ext cx="588096" cy="1228523"/>
-          </a:xfrm>
-          <a:prstGeom prst="rect">
-            <a:avLst/>
-          </a:prstGeom>
-        </p:spPr>
-      </p:pic>
+              <a:t>CEA055 - Estatística e Probabilidade - Professor: Marcos Goulart Lima</a:t>
+            </a:r>
+          </a:p>
+        </p:txBody>
+      </p:sp>
     </p:spTree>
   </p:cSld>
   <p:clrMapOvr>
@@ -7532,50 +6662,6 @@
       </p:grpSpPr>
       <p:sp>
         <p:nvSpPr>
-          <p:cNvPr id="2" name="Título 1"/>
-          <p:cNvSpPr>
-            <a:spLocks noGrp="1"/>
-          </p:cNvSpPr>
-          <p:nvPr>
-            <p:ph type="title"/>
-          </p:nvPr>
-        </p:nvSpPr>
-        <p:spPr>
-          <a:xfrm>
-            <a:off x="1032611" y="0"/>
-            <a:ext cx="10827959" cy="900000"/>
-          </a:xfrm>
-        </p:spPr>
-        <p:txBody>
-          <a:bodyPr>
-            <a:normAutofit/>
-          </a:bodyPr>
-          <a:lstStyle/>
-          <a:p>
-            <a:pPr algn="ctr"/>
-            <a:r>
-              <a:rPr lang="pt-BR" dirty="0">
-                <a:latin typeface="AlternateGothic2 BT" panose="020B0608020202050204" pitchFamily="34" charset="0"/>
-              </a:rPr>
-              <a:t>CEA055 – Estatística e Probabilidade</a:t>
-            </a:r>
-            <a:br>
-              <a:rPr lang="pt-BR" dirty="0">
-                <a:latin typeface="AlternateGothic2 BT" panose="020B0608020202050204" pitchFamily="34" charset="0"/>
-              </a:rPr>
-            </a:br>
-            <a:r>
-              <a:rPr lang="pt-BR" sz="1800" b="1" dirty="0"/>
-              <a:t>T-Student e Qui-Quadrado</a:t>
-            </a:r>
-            <a:endParaRPr lang="pt-BR" dirty="0">
-              <a:latin typeface="AlternateGothic2 BT" panose="020B0608020202050204" pitchFamily="34" charset="0"/>
-            </a:endParaRPr>
-          </a:p>
-        </p:txBody>
-      </p:sp>
-      <p:sp>
-        <p:nvSpPr>
           <p:cNvPr id="6" name="Caixa"/>
           <p:cNvSpPr txBox="1"/>
           <p:nvPr/>
@@ -7666,7 +6752,7 @@
         <p:spPr>
           <a:xfrm>
             <a:off x="361395" y="6488668"/>
-            <a:ext cx="2395336" cy="300210"/>
+            <a:ext cx="7620000" cy="300210"/>
           </a:xfrm>
           <a:prstGeom prst="rect">
             <a:avLst/>
@@ -7681,35 +6767,11 @@
           <a:p>
             <a:r>
               <a:rPr lang="pt-BR" sz="1351" dirty="0"/>
-              <a:t>Professor: Marcos Goulart Lima</a:t>
-            </a:r>
-          </a:p>
-        </p:txBody>
-      </p:sp>
-      <p:pic>
-        <p:nvPicPr>
-          <p:cNvPr id="8" name="Logo UFOP"/>
-          <p:cNvPicPr>
-            <a:picLocks noChangeAspect="1"/>
-          </p:cNvPicPr>
-          <p:nvPr/>
-        </p:nvPicPr>
-        <p:blipFill>
-          <a:blip r:embed="rId3"/>
-          <a:stretch>
-            <a:fillRect/>
-          </a:stretch>
-        </p:blipFill>
-        <p:spPr>
-          <a:xfrm>
-            <a:off x="62144" y="112237"/>
-            <a:ext cx="588096" cy="1228523"/>
-          </a:xfrm>
-          <a:prstGeom prst="rect">
-            <a:avLst/>
-          </a:prstGeom>
-        </p:spPr>
-      </p:pic>
+              <a:t>CEA055 - Estatística e Probabilidade - Professor: Marcos Goulart Lima</a:t>
+            </a:r>
+          </a:p>
+        </p:txBody>
+      </p:sp>
     </p:spTree>
   </p:cSld>
   <p:clrMapOvr>
@@ -7737,50 +6799,6 @@
       </p:grpSpPr>
       <p:sp>
         <p:nvSpPr>
-          <p:cNvPr id="2" name="Título 1"/>
-          <p:cNvSpPr>
-            <a:spLocks noGrp="1"/>
-          </p:cNvSpPr>
-          <p:nvPr>
-            <p:ph type="title"/>
-          </p:nvPr>
-        </p:nvSpPr>
-        <p:spPr>
-          <a:xfrm>
-            <a:off x="1032611" y="0"/>
-            <a:ext cx="10827959" cy="900000"/>
-          </a:xfrm>
-        </p:spPr>
-        <p:txBody>
-          <a:bodyPr>
-            <a:normAutofit/>
-          </a:bodyPr>
-          <a:lstStyle/>
-          <a:p>
-            <a:pPr algn="ctr"/>
-            <a:r>
-              <a:rPr lang="pt-BR" dirty="0">
-                <a:latin typeface="AlternateGothic2 BT" panose="020B0608020202050204" pitchFamily="34" charset="0"/>
-              </a:rPr>
-              <a:t>CEA055 – Estatística e Probabilidade</a:t>
-            </a:r>
-            <a:br>
-              <a:rPr lang="pt-BR" dirty="0">
-                <a:latin typeface="AlternateGothic2 BT" panose="020B0608020202050204" pitchFamily="34" charset="0"/>
-              </a:rPr>
-            </a:br>
-            <a:r>
-              <a:rPr lang="pt-BR" sz="1800" b="1" dirty="0"/>
-              <a:t>T-Student e Qui-Quadrado</a:t>
-            </a:r>
-            <a:endParaRPr lang="pt-BR" dirty="0">
-              <a:latin typeface="AlternateGothic2 BT" panose="020B0608020202050204" pitchFamily="34" charset="0"/>
-            </a:endParaRPr>
-          </a:p>
-        </p:txBody>
-      </p:sp>
-      <p:sp>
-        <p:nvSpPr>
           <p:cNvPr id="6" name="Caixa"/>
           <p:cNvSpPr txBox="1"/>
           <p:nvPr/>
@@ -7838,7 +6856,7 @@
         <p:spPr>
           <a:xfrm>
             <a:off x="361395" y="6488668"/>
-            <a:ext cx="2395336" cy="300210"/>
+            <a:ext cx="7620000" cy="300210"/>
           </a:xfrm>
           <a:prstGeom prst="rect">
             <a:avLst/>
@@ -7853,35 +6871,11 @@
           <a:p>
             <a:r>
               <a:rPr lang="pt-BR" sz="1351" dirty="0"/>
-              <a:t>Professor: Marcos Goulart Lima</a:t>
-            </a:r>
-          </a:p>
-        </p:txBody>
-      </p:sp>
-      <p:pic>
-        <p:nvPicPr>
-          <p:cNvPr id="8" name="Logo UFOP"/>
-          <p:cNvPicPr>
-            <a:picLocks noChangeAspect="1"/>
-          </p:cNvPicPr>
-          <p:nvPr/>
-        </p:nvPicPr>
-        <p:blipFill>
-          <a:blip r:embed="rId3"/>
-          <a:stretch>
-            <a:fillRect/>
-          </a:stretch>
-        </p:blipFill>
-        <p:spPr>
-          <a:xfrm>
-            <a:off x="62144" y="112237"/>
-            <a:ext cx="588096" cy="1228523"/>
-          </a:xfrm>
-          <a:prstGeom prst="rect">
-            <a:avLst/>
-          </a:prstGeom>
-        </p:spPr>
-      </p:pic>
+              <a:t>CEA055 - Estatística e Probabilidade - Professor: Marcos Goulart Lima</a:t>
+            </a:r>
+          </a:p>
+        </p:txBody>
+      </p:sp>
     </p:spTree>
   </p:cSld>
   <p:clrMapOvr>
@@ -7907,50 +6901,6 @@
           <a:chExt cx="0" cy="0"/>
         </a:xfrm>
       </p:grpSpPr>
-      <p:sp>
-        <p:nvSpPr>
-          <p:cNvPr id="2" name="Título 1"/>
-          <p:cNvSpPr>
-            <a:spLocks noGrp="1"/>
-          </p:cNvSpPr>
-          <p:nvPr>
-            <p:ph type="title"/>
-          </p:nvPr>
-        </p:nvSpPr>
-        <p:spPr>
-          <a:xfrm>
-            <a:off x="1032611" y="0"/>
-            <a:ext cx="10827959" cy="900000"/>
-          </a:xfrm>
-        </p:spPr>
-        <p:txBody>
-          <a:bodyPr>
-            <a:normAutofit/>
-          </a:bodyPr>
-          <a:lstStyle/>
-          <a:p>
-            <a:pPr algn="ctr"/>
-            <a:r>
-              <a:rPr lang="pt-BR" dirty="0">
-                <a:latin typeface="AlternateGothic2 BT" panose="020B0608020202050204" pitchFamily="34" charset="0"/>
-              </a:rPr>
-              <a:t>CEA055 – Estatística e Probabilidade</a:t>
-            </a:r>
-            <a:br>
-              <a:rPr lang="pt-BR" dirty="0">
-                <a:latin typeface="AlternateGothic2 BT" panose="020B0608020202050204" pitchFamily="34" charset="0"/>
-              </a:rPr>
-            </a:br>
-            <a:r>
-              <a:rPr lang="pt-BR" sz="1800" b="1" dirty="0"/>
-              <a:t>T-Student e Qui-Quadrado</a:t>
-            </a:r>
-            <a:endParaRPr lang="pt-BR" dirty="0">
-              <a:latin typeface="AlternateGothic2 BT" panose="020B0608020202050204" pitchFamily="34" charset="0"/>
-            </a:endParaRPr>
-          </a:p>
-        </p:txBody>
-      </p:sp>
       <p:sp>
         <p:nvSpPr>
           <p:cNvPr id="6" name="Caixa"/>
@@ -8075,7 +7025,7 @@
         <p:spPr>
           <a:xfrm>
             <a:off x="361395" y="6488668"/>
-            <a:ext cx="2395336" cy="300210"/>
+            <a:ext cx="7620000" cy="300210"/>
           </a:xfrm>
           <a:prstGeom prst="rect">
             <a:avLst/>
@@ -8090,35 +7040,11 @@
           <a:p>
             <a:r>
               <a:rPr lang="pt-BR" sz="1351" dirty="0"/>
-              <a:t>Professor: Marcos Goulart Lima</a:t>
-            </a:r>
-          </a:p>
-        </p:txBody>
-      </p:sp>
-      <p:pic>
-        <p:nvPicPr>
-          <p:cNvPr id="8" name="Logo UFOP"/>
-          <p:cNvPicPr>
-            <a:picLocks noChangeAspect="1"/>
-          </p:cNvPicPr>
-          <p:nvPr/>
-        </p:nvPicPr>
-        <p:blipFill>
-          <a:blip r:embed="rId3"/>
-          <a:stretch>
-            <a:fillRect/>
-          </a:stretch>
-        </p:blipFill>
-        <p:spPr>
-          <a:xfrm>
-            <a:off x="62144" y="112237"/>
-            <a:ext cx="588096" cy="1228523"/>
-          </a:xfrm>
-          <a:prstGeom prst="rect">
-            <a:avLst/>
-          </a:prstGeom>
-        </p:spPr>
-      </p:pic>
+              <a:t>CEA055 - Estatística e Probabilidade - Professor: Marcos Goulart Lima</a:t>
+            </a:r>
+          </a:p>
+        </p:txBody>
+      </p:sp>
     </p:spTree>
   </p:cSld>
   <p:clrMapOvr>
